--- a/apresentacao tvc3.2.pptx
+++ b/apresentacao tvc3.2.pptx
@@ -8,9 +8,11 @@
     <p:sldId id="256" r:id="rId2"/>
     <p:sldId id="257" r:id="rId3"/>
     <p:sldId id="258" r:id="rId4"/>
+    <p:sldId id="259" r:id="rId5"/>
+    <p:sldId id="260" r:id="rId6"/>
   </p:sldIdLst>
   <p:notesMasterIdLst>
-    <p:notesMasterId r:id="rId5"/>
+    <p:notesMasterId r:id="rId7"/>
   </p:notesMasterIdLst>
   <p:sldSz cx="9144000" cy="5143500"/>
   <p:notesSz cx="5143500" cy="9144000"/>
@@ -792,20 +794,476 @@
       </p:grpSpPr>
       <p:sp>
         <p:nvSpPr>
-          <p:cNvPr id="2" name="E2"/>
-          <p:cNvSpPr/>
-          <p:nvPr/>
-        </p:nvSpPr>
-        <p:spPr>
-          <a:xfrm>
-            <a:off x="502920" y="457200"/>
-            <a:ext cx="640080" cy="640080"/>
+          <p:cNvPr id="2" name="B2"/>
+          <p:cNvSpPr/>
+          <p:nvPr/>
+        </p:nvSpPr>
+        <p:spPr>
+          <a:xfrm>
+            <a:off x="457200" y="4763500"/>
+            <a:ext cx="100584" cy="380000"/>
+          </a:xfrm>
+          <a:prstGeom prst="roundRect">
+            <a:avLst>
+              <a:gd name="adj" fmla="val 45455"/>
+            </a:avLst>
+          </a:prstGeom>
+          <a:solidFill>
+            <a:srgbClr val="7C3AED">
+              <a:alpha val="65000"/>
+            </a:srgbClr>
+          </a:solidFill>
+          <a:ln/>
+        </p:spPr>
+      </p:sp>
+      <p:sp>
+        <p:nvSpPr>
+          <p:cNvPr id="3" name="B3"/>
+          <p:cNvSpPr/>
+          <p:nvPr/>
+        </p:nvSpPr>
+        <p:spPr>
+          <a:xfrm>
+            <a:off x="626364" y="4614668"/>
+            <a:ext cx="100584" cy="528832"/>
+          </a:xfrm>
+          <a:prstGeom prst="roundRect">
+            <a:avLst>
+              <a:gd name="adj" fmla="val 45455"/>
+            </a:avLst>
+          </a:prstGeom>
+          <a:solidFill>
+            <a:srgbClr val="DB2777">
+              <a:alpha val="65000"/>
+            </a:srgbClr>
+          </a:solidFill>
+          <a:ln/>
+        </p:spPr>
+      </p:sp>
+      <p:sp>
+        <p:nvSpPr>
+          <p:cNvPr id="4" name="B4"/>
+          <p:cNvSpPr/>
+          <p:nvPr/>
+        </p:nvSpPr>
+        <p:spPr>
+          <a:xfrm>
+            <a:off x="795528" y="4578469"/>
+            <a:ext cx="100584" cy="565031"/>
+          </a:xfrm>
+          <a:prstGeom prst="roundRect">
+            <a:avLst>
+              <a:gd name="adj" fmla="val 45455"/>
+            </a:avLst>
+          </a:prstGeom>
+          <a:solidFill>
+            <a:srgbClr val="0891B2">
+              <a:alpha val="65000"/>
+            </a:srgbClr>
+          </a:solidFill>
+          <a:ln/>
+        </p:spPr>
+      </p:sp>
+      <p:sp>
+        <p:nvSpPr>
+          <p:cNvPr id="5" name="B5"/>
+          <p:cNvSpPr/>
+          <p:nvPr/>
+        </p:nvSpPr>
+        <p:spPr>
+          <a:xfrm>
+            <a:off x="964692" y="4682298"/>
+            <a:ext cx="100584" cy="461202"/>
+          </a:xfrm>
+          <a:prstGeom prst="roundRect">
+            <a:avLst>
+              <a:gd name="adj" fmla="val 45455"/>
+            </a:avLst>
+          </a:prstGeom>
+          <a:solidFill>
+            <a:srgbClr val="7C3AED">
+              <a:alpha val="65000"/>
+            </a:srgbClr>
+          </a:solidFill>
+          <a:ln/>
+        </p:spPr>
+      </p:sp>
+      <p:sp>
+        <p:nvSpPr>
+          <p:cNvPr id="6" name="B6"/>
+          <p:cNvSpPr/>
+          <p:nvPr/>
+        </p:nvSpPr>
+        <p:spPr>
+          <a:xfrm>
+            <a:off x="1133856" y="4847579"/>
+            <a:ext cx="100584" cy="295921"/>
+          </a:xfrm>
+          <a:prstGeom prst="roundRect">
+            <a:avLst>
+              <a:gd name="adj" fmla="val 45455"/>
+            </a:avLst>
+          </a:prstGeom>
+          <a:solidFill>
+            <a:srgbClr val="DB2777">
+              <a:alpha val="65000"/>
+            </a:srgbClr>
+          </a:solidFill>
+          <a:ln/>
+        </p:spPr>
+      </p:sp>
+      <p:sp>
+        <p:nvSpPr>
+          <p:cNvPr id="7" name="B7"/>
+          <p:cNvSpPr/>
+          <p:nvPr/>
+        </p:nvSpPr>
+        <p:spPr>
+          <a:xfrm>
+            <a:off x="1303020" y="4949231"/>
+            <a:ext cx="100584" cy="194269"/>
+          </a:xfrm>
+          <a:prstGeom prst="roundRect">
+            <a:avLst>
+              <a:gd name="adj" fmla="val 45455"/>
+            </a:avLst>
+          </a:prstGeom>
+          <a:solidFill>
+            <a:srgbClr val="0891B2">
+              <a:alpha val="65000"/>
+            </a:srgbClr>
+          </a:solidFill>
+          <a:ln/>
+        </p:spPr>
+      </p:sp>
+      <p:sp>
+        <p:nvSpPr>
+          <p:cNvPr id="8" name="B8"/>
+          <p:cNvSpPr/>
+          <p:nvPr/>
+        </p:nvSpPr>
+        <p:spPr>
+          <a:xfrm>
+            <a:off x="1472184" y="4910326"/>
+            <a:ext cx="100584" cy="233174"/>
+          </a:xfrm>
+          <a:prstGeom prst="roundRect">
+            <a:avLst>
+              <a:gd name="adj" fmla="val 45455"/>
+            </a:avLst>
+          </a:prstGeom>
+          <a:solidFill>
+            <a:srgbClr val="7C3AED">
+              <a:alpha val="65000"/>
+            </a:srgbClr>
+          </a:solidFill>
+          <a:ln/>
+        </p:spPr>
+      </p:sp>
+      <p:sp>
+        <p:nvSpPr>
+          <p:cNvPr id="9" name="B9"/>
+          <p:cNvSpPr/>
+          <p:nvPr/>
+        </p:nvSpPr>
+        <p:spPr>
+          <a:xfrm>
+            <a:off x="1641348" y="4760306"/>
+            <a:ext cx="100584" cy="383194"/>
+          </a:xfrm>
+          <a:prstGeom prst="roundRect">
+            <a:avLst>
+              <a:gd name="adj" fmla="val 45455"/>
+            </a:avLst>
+          </a:prstGeom>
+          <a:solidFill>
+            <a:srgbClr val="DB2777">
+              <a:alpha val="65000"/>
+            </a:srgbClr>
+          </a:solidFill>
+          <a:ln/>
+        </p:spPr>
+      </p:sp>
+      <p:sp>
+        <p:nvSpPr>
+          <p:cNvPr id="10" name="B10"/>
+          <p:cNvSpPr/>
+          <p:nvPr/>
+        </p:nvSpPr>
+        <p:spPr>
+          <a:xfrm>
+            <a:off x="1810512" y="4612704"/>
+            <a:ext cx="100584" cy="530796"/>
+          </a:xfrm>
+          <a:prstGeom prst="roundRect">
+            <a:avLst>
+              <a:gd name="adj" fmla="val 45455"/>
+            </a:avLst>
+          </a:prstGeom>
+          <a:solidFill>
+            <a:srgbClr val="0891B2">
+              <a:alpha val="65000"/>
+            </a:srgbClr>
+          </a:solidFill>
+          <a:ln/>
+        </p:spPr>
+      </p:sp>
+      <p:sp>
+        <p:nvSpPr>
+          <p:cNvPr id="11" name="B11"/>
+          <p:cNvSpPr/>
+          <p:nvPr/>
+        </p:nvSpPr>
+        <p:spPr>
+          <a:xfrm>
+            <a:off x="1979676" y="4579221"/>
+            <a:ext cx="100584" cy="564279"/>
+          </a:xfrm>
+          <a:prstGeom prst="roundRect">
+            <a:avLst>
+              <a:gd name="adj" fmla="val 45455"/>
+            </a:avLst>
+          </a:prstGeom>
+          <a:solidFill>
+            <a:srgbClr val="7C3AED">
+              <a:alpha val="65000"/>
+            </a:srgbClr>
+          </a:solidFill>
+          <a:ln/>
+        </p:spPr>
+      </p:sp>
+      <p:sp>
+        <p:nvSpPr>
+          <p:cNvPr id="12" name="B12"/>
+          <p:cNvSpPr/>
+          <p:nvPr/>
+        </p:nvSpPr>
+        <p:spPr>
+          <a:xfrm>
+            <a:off x="2148840" y="4685198"/>
+            <a:ext cx="100584" cy="458302"/>
+          </a:xfrm>
+          <a:prstGeom prst="roundRect">
+            <a:avLst>
+              <a:gd name="adj" fmla="val 45455"/>
+            </a:avLst>
+          </a:prstGeom>
+          <a:solidFill>
+            <a:srgbClr val="DB2777">
+              <a:alpha val="65000"/>
+            </a:srgbClr>
+          </a:solidFill>
+          <a:ln/>
+        </p:spPr>
+      </p:sp>
+      <p:sp>
+        <p:nvSpPr>
+          <p:cNvPr id="13" name="B13"/>
+          <p:cNvSpPr/>
+          <p:nvPr/>
+        </p:nvSpPr>
+        <p:spPr>
+          <a:xfrm>
+            <a:off x="2318004" y="4850432"/>
+            <a:ext cx="100584" cy="293068"/>
+          </a:xfrm>
+          <a:prstGeom prst="roundRect">
+            <a:avLst>
+              <a:gd name="adj" fmla="val 45455"/>
+            </a:avLst>
+          </a:prstGeom>
+          <a:solidFill>
+            <a:srgbClr val="0891B2">
+              <a:alpha val="65000"/>
+            </a:srgbClr>
+          </a:solidFill>
+          <a:ln/>
+        </p:spPr>
+      </p:sp>
+      <p:sp>
+        <p:nvSpPr>
+          <p:cNvPr id="14" name="B14"/>
+          <p:cNvSpPr/>
+          <p:nvPr/>
+        </p:nvSpPr>
+        <p:spPr>
+          <a:xfrm>
+            <a:off x="2487168" y="4949878"/>
+            <a:ext cx="100584" cy="193622"/>
+          </a:xfrm>
+          <a:prstGeom prst="roundRect">
+            <a:avLst>
+              <a:gd name="adj" fmla="val 45455"/>
+            </a:avLst>
+          </a:prstGeom>
+          <a:solidFill>
+            <a:srgbClr val="7C3AED">
+              <a:alpha val="65000"/>
+            </a:srgbClr>
+          </a:solidFill>
+          <a:ln/>
+        </p:spPr>
+      </p:sp>
+      <p:sp>
+        <p:nvSpPr>
+          <p:cNvPr id="15" name="B15"/>
+          <p:cNvSpPr/>
+          <p:nvPr/>
+        </p:nvSpPr>
+        <p:spPr>
+          <a:xfrm>
+            <a:off x="2656332" y="4908277"/>
+            <a:ext cx="100584" cy="235223"/>
+          </a:xfrm>
+          <a:prstGeom prst="roundRect">
+            <a:avLst>
+              <a:gd name="adj" fmla="val 45455"/>
+            </a:avLst>
+          </a:prstGeom>
+          <a:solidFill>
+            <a:srgbClr val="DB2777">
+              <a:alpha val="65000"/>
+            </a:srgbClr>
+          </a:solidFill>
+          <a:ln/>
+        </p:spPr>
+      </p:sp>
+      <p:sp>
+        <p:nvSpPr>
+          <p:cNvPr id="16" name="B16"/>
+          <p:cNvSpPr/>
+          <p:nvPr/>
+        </p:nvSpPr>
+        <p:spPr>
+          <a:xfrm>
+            <a:off x="2825496" y="4757112"/>
+            <a:ext cx="100584" cy="386388"/>
+          </a:xfrm>
+          <a:prstGeom prst="roundRect">
+            <a:avLst>
+              <a:gd name="adj" fmla="val 45455"/>
+            </a:avLst>
+          </a:prstGeom>
+          <a:solidFill>
+            <a:srgbClr val="0891B2">
+              <a:alpha val="65000"/>
+            </a:srgbClr>
+          </a:solidFill>
+          <a:ln/>
+        </p:spPr>
+      </p:sp>
+      <p:sp>
+        <p:nvSpPr>
+          <p:cNvPr id="17" name="B17"/>
+          <p:cNvSpPr/>
+          <p:nvPr/>
+        </p:nvSpPr>
+        <p:spPr>
+          <a:xfrm>
+            <a:off x="2994660" y="4610781"/>
+            <a:ext cx="100584" cy="532719"/>
+          </a:xfrm>
+          <a:prstGeom prst="roundRect">
+            <a:avLst>
+              <a:gd name="adj" fmla="val 45455"/>
+            </a:avLst>
+          </a:prstGeom>
+          <a:solidFill>
+            <a:srgbClr val="7C3AED">
+              <a:alpha val="65000"/>
+            </a:srgbClr>
+          </a:solidFill>
+          <a:ln/>
+        </p:spPr>
+      </p:sp>
+      <p:sp>
+        <p:nvSpPr>
+          <p:cNvPr id="18" name="B18"/>
+          <p:cNvSpPr/>
+          <p:nvPr/>
+        </p:nvSpPr>
+        <p:spPr>
+          <a:xfrm>
+            <a:off x="3163824" y="4580026"/>
+            <a:ext cx="100584" cy="563474"/>
+          </a:xfrm>
+          <a:prstGeom prst="roundRect">
+            <a:avLst>
+              <a:gd name="adj" fmla="val 45455"/>
+            </a:avLst>
+          </a:prstGeom>
+          <a:solidFill>
+            <a:srgbClr val="DB2777">
+              <a:alpha val="65000"/>
+            </a:srgbClr>
+          </a:solidFill>
+          <a:ln/>
+        </p:spPr>
+      </p:sp>
+      <p:sp>
+        <p:nvSpPr>
+          <p:cNvPr id="19" name="B19"/>
+          <p:cNvSpPr/>
+          <p:nvPr/>
+        </p:nvSpPr>
+        <p:spPr>
+          <a:xfrm>
+            <a:off x="3332988" y="4688120"/>
+            <a:ext cx="100584" cy="455380"/>
+          </a:xfrm>
+          <a:prstGeom prst="roundRect">
+            <a:avLst>
+              <a:gd name="adj" fmla="val 45455"/>
+            </a:avLst>
+          </a:prstGeom>
+          <a:solidFill>
+            <a:srgbClr val="0891B2">
+              <a:alpha val="65000"/>
+            </a:srgbClr>
+          </a:solidFill>
+          <a:ln/>
+        </p:spPr>
+      </p:sp>
+      <p:sp>
+        <p:nvSpPr>
+          <p:cNvPr id="20" name="B20"/>
+          <p:cNvSpPr/>
+          <p:nvPr/>
+        </p:nvSpPr>
+        <p:spPr>
+          <a:xfrm>
+            <a:off x="3502152" y="4853261"/>
+            <a:ext cx="100584" cy="290239"/>
+          </a:xfrm>
+          <a:prstGeom prst="roundRect">
+            <a:avLst>
+              <a:gd name="adj" fmla="val 45455"/>
+            </a:avLst>
+          </a:prstGeom>
+          <a:solidFill>
+            <a:srgbClr val="7C3AED">
+              <a:alpha val="65000"/>
+            </a:srgbClr>
+          </a:solidFill>
+          <a:ln/>
+        </p:spPr>
+      </p:sp>
+      <p:sp>
+        <p:nvSpPr>
+          <p:cNvPr id="21" name="C21"/>
+          <p:cNvSpPr/>
+          <p:nvPr/>
+        </p:nvSpPr>
+        <p:spPr>
+          <a:xfrm>
+            <a:off x="502920" y="502920"/>
+            <a:ext cx="777240" cy="777240"/>
           </a:xfrm>
           <a:prstGeom prst="ellipse">
             <a:avLst/>
           </a:prstGeom>
           <a:solidFill>
-            <a:srgbClr val="7C3AED"/>
+            <a:srgbClr val="DB2777"/>
           </a:solidFill>
           <a:ln/>
           <a:effectLst>
@@ -819,7 +1277,7 @@
       </p:sp>
       <p:pic>
         <p:nvPicPr>
-          <p:cNvPr id="3" name="icon" descr="icon"/>
+          <p:cNvPr id="22" name="icon" descr="icon"/>
           <p:cNvPicPr>
             <a:picLocks noChangeAspect="1"/>
           </p:cNvPicPr>
@@ -833,8 +1291,8 @@
         </p:blipFill>
         <p:spPr>
           <a:xfrm>
-            <a:off x="658368" y="612648"/>
-            <a:ext cx="329184" cy="329184"/>
+            <a:off x="722376" y="722376"/>
+            <a:ext cx="338328" cy="338328"/>
           </a:xfrm>
           <a:prstGeom prst="rect">
             <a:avLst/>
@@ -843,14 +1301,14 @@
       </p:pic>
       <p:sp>
         <p:nvSpPr>
-          <p:cNvPr id="4" name="T4"/>
-          <p:cNvSpPr/>
-          <p:nvPr/>
-        </p:nvSpPr>
-        <p:spPr>
-          <a:xfrm>
-            <a:off x="1325880" y="438912"/>
-            <a:ext cx="7000000" cy="274320"/>
+          <p:cNvPr id="23" name="T23"/>
+          <p:cNvSpPr/>
+          <p:nvPr/>
+        </p:nvSpPr>
+        <p:spPr>
+          <a:xfrm>
+            <a:off x="502920" y="1554480"/>
+            <a:ext cx="8229600" cy="274320"/>
           </a:xfrm>
           <a:prstGeom prst="rect">
             <a:avLst/>
@@ -866,7 +1324,7 @@
               <a:buNone/>
             </a:pPr>
             <a:r>
-              <a:rPr lang="pt-BR" sz="1100" b="1" spc="200" kern="0" dirty="0">
+              <a:rPr lang="pt-BR" sz="1100" b="1" spc="150" kern="0" dirty="0">
                 <a:solidFill>
                   <a:srgbClr val="7C3AED"/>
                 </a:solidFill>
@@ -874,21 +1332,21 @@
                 <a:ea typeface="Consolas"/>
                 <a:cs typeface="Consolas"/>
               </a:rPr>
-              <a:t>07 — IMPLEMENTAÇÃO</a:t>
-            </a:r>
-          </a:p>
-        </p:txBody>
-      </p:sp>
-      <p:sp>
-        <p:nvSpPr>
-          <p:cNvPr id="5" name="T5"/>
-          <p:cNvSpPr/>
-          <p:nvPr/>
-        </p:nvSpPr>
-        <p:spPr>
-          <a:xfrm>
-            <a:off x="1325880" y="690000"/>
-            <a:ext cx="7315200" cy="470000"/>
+              <a:t>TVC 3  ·  PARTE 2  —  IMPLEMENTAÇÃO E RESULTADOS</a:t>
+            </a:r>
+          </a:p>
+        </p:txBody>
+      </p:sp>
+      <p:sp>
+        <p:nvSpPr>
+          <p:cNvPr id="24" name="T24"/>
+          <p:cNvSpPr/>
+          <p:nvPr/>
+        </p:nvSpPr>
+        <p:spPr>
+          <a:xfrm>
+            <a:off x="457200" y="1874520"/>
+            <a:ext cx="8412480" cy="685800"/>
           </a:xfrm>
           <a:prstGeom prst="rect">
             <a:avLst/>
@@ -904,7 +1362,7 @@
               <a:buNone/>
             </a:pPr>
             <a:r>
-              <a:rPr lang="pt-BR" sz="2600" b="1" dirty="0">
+              <a:rPr lang="pt-BR" sz="4400" b="1" dirty="0">
                 <a:solidFill>
                   <a:srgbClr val="241C3B"/>
                 </a:solidFill>
@@ -912,411 +1370,21 @@
                 <a:ea typeface="Calibri"/>
                 <a:cs typeface="Calibri"/>
               </a:rPr>
-              <a:t>O protótipo construído</a:t>
-            </a:r>
-          </a:p>
-        </p:txBody>
-      </p:sp>
-      <p:sp>
-        <p:nvSpPr>
-          <p:cNvPr id="6" name="R6"/>
-          <p:cNvSpPr/>
-          <p:nvPr/>
-        </p:nvSpPr>
-        <p:spPr>
-          <a:xfrm>
-            <a:off x="502920" y="1360000"/>
-            <a:ext cx="1900000" cy="1010000"/>
-          </a:xfrm>
-          <a:prstGeom prst="roundRect">
-            <a:avLst>
-              <a:gd name="adj" fmla="val 10526"/>
-            </a:avLst>
-          </a:prstGeom>
-          <a:solidFill>
-            <a:srgbClr val="F1ECFB"/>
-          </a:solidFill>
-          <a:ln/>
-          <a:effectLst>
-            <a:outerShdw sx="100000" sy="100000" kx="0" ky="0" algn="bl" rotWithShape="0" blurRad="101600" dist="25400" dir="5400000">
-              <a:srgbClr val="6B6392">
-                <a:alpha val="18000"/>
-              </a:srgbClr>
-            </a:outerShdw>
-          </a:effectLst>
-        </p:spPr>
-      </p:sp>
-      <p:sp>
-        <p:nvSpPr>
-          <p:cNvPr id="7" name="T7"/>
-          <p:cNvSpPr/>
-          <p:nvPr/>
-        </p:nvSpPr>
-        <p:spPr>
-          <a:xfrm>
-            <a:off x="502920" y="1360000"/>
-            <a:ext cx="1900000" cy="1010000"/>
-          </a:xfrm>
-          <a:prstGeom prst="rect">
-            <a:avLst/>
-          </a:prstGeom>
-          <a:noFill/>
-          <a:ln/>
-        </p:spPr>
-        <p:txBody>
-          <a:bodyPr wrap="square" lIns="91440" tIns="45720" rIns="91440" bIns="45720" rtlCol="0" anchor="ctr"/>
-          <a:lstStyle/>
-          <a:p>
-            <a:pPr algn="ctr" indent="0" marL="0">
-              <a:lnSpc>
-                <a:spcPct val="95000"/>
-              </a:lnSpc>
-              <a:buNone/>
-            </a:pPr>
-            <a:r>
-              <a:rPr lang="pt-BR" sz="2400" b="1" dirty="0">
-                <a:solidFill>
-                  <a:srgbClr val="7C3AED"/>
-                </a:solidFill>
-                <a:latin typeface="Calibri" pitchFamily="34" charset="0"/>
-                <a:ea typeface="Calibri"/>
-                <a:cs typeface="Calibri"/>
-              </a:rPr>
-              <a:t>89.740</a:t>
-            </a:r>
-          </a:p>
-          <a:p>
-            <a:pPr algn="ctr" indent="0" marL="0">
-              <a:lnSpc>
-                <a:spcPct val="100000"/>
-              </a:lnSpc>
-              <a:spcBef>
-                <a:spcPts val="400"/>
-              </a:spcBef>
-              <a:buNone/>
-            </a:pPr>
-            <a:r>
-              <a:rPr lang="pt-BR" sz="1000" b="1" dirty="0">
-                <a:solidFill>
-                  <a:srgbClr val="241C3B"/>
-                </a:solidFill>
-                <a:latin typeface="Calibri" pitchFamily="34" charset="0"/>
-                <a:ea typeface="Calibri"/>
-                <a:cs typeface="Calibri"/>
-              </a:rPr>
-              <a:t>faixas no catálogo efetivo</a:t>
-            </a:r>
-          </a:p>
-        </p:txBody>
-      </p:sp>
-      <p:sp>
-        <p:nvSpPr>
-          <p:cNvPr id="8" name="R8"/>
-          <p:cNvSpPr/>
-          <p:nvPr/>
-        </p:nvSpPr>
-        <p:spPr>
-          <a:xfrm>
-            <a:off x="2582306" y="1360000"/>
-            <a:ext cx="1900000" cy="1010000"/>
-          </a:xfrm>
-          <a:prstGeom prst="roundRect">
-            <a:avLst>
-              <a:gd name="adj" fmla="val 10526"/>
-            </a:avLst>
-          </a:prstGeom>
-          <a:solidFill>
-            <a:srgbClr val="F1ECFB"/>
-          </a:solidFill>
-          <a:ln/>
-          <a:effectLst>
-            <a:outerShdw sx="100000" sy="100000" kx="0" ky="0" algn="bl" rotWithShape="0" blurRad="101600" dist="25400" dir="5400000">
-              <a:srgbClr val="6B6392">
-                <a:alpha val="18000"/>
-              </a:srgbClr>
-            </a:outerShdw>
-          </a:effectLst>
-        </p:spPr>
-      </p:sp>
-      <p:sp>
-        <p:nvSpPr>
-          <p:cNvPr id="9" name="T9"/>
-          <p:cNvSpPr/>
-          <p:nvPr/>
-        </p:nvSpPr>
-        <p:spPr>
-          <a:xfrm>
-            <a:off x="2582306" y="1360000"/>
-            <a:ext cx="1900000" cy="1010000"/>
-          </a:xfrm>
-          <a:prstGeom prst="rect">
-            <a:avLst/>
-          </a:prstGeom>
-          <a:noFill/>
-          <a:ln/>
-        </p:spPr>
-        <p:txBody>
-          <a:bodyPr wrap="square" lIns="91440" tIns="45720" rIns="91440" bIns="45720" rtlCol="0" anchor="ctr"/>
-          <a:lstStyle/>
-          <a:p>
-            <a:pPr algn="ctr" indent="0" marL="0">
-              <a:lnSpc>
-                <a:spcPct val="95000"/>
-              </a:lnSpc>
-              <a:buNone/>
-            </a:pPr>
-            <a:r>
-              <a:rPr lang="pt-BR" sz="3200" b="1" dirty="0">
-                <a:solidFill>
-                  <a:srgbClr val="7C3AED"/>
-                </a:solidFill>
-                <a:latin typeface="Calibri" pitchFamily="34" charset="0"/>
-                <a:ea typeface="Calibri"/>
-                <a:cs typeface="Calibri"/>
-              </a:rPr>
-              <a:t>11</a:t>
-            </a:r>
-          </a:p>
-          <a:p>
-            <a:pPr algn="ctr" indent="0" marL="0">
-              <a:lnSpc>
-                <a:spcPct val="100000"/>
-              </a:lnSpc>
-              <a:spcBef>
-                <a:spcPts val="400"/>
-              </a:spcBef>
-              <a:buNone/>
-            </a:pPr>
-            <a:r>
-              <a:rPr lang="pt-BR" sz="1000" b="1" dirty="0">
-                <a:solidFill>
-                  <a:srgbClr val="241C3B"/>
-                </a:solidFill>
-                <a:latin typeface="Calibri" pitchFamily="34" charset="0"/>
-                <a:ea typeface="Calibri"/>
-                <a:cs typeface="Calibri"/>
-              </a:rPr>
-              <a:t>features de áudio · z-score</a:t>
-            </a:r>
-          </a:p>
-        </p:txBody>
-      </p:sp>
-      <p:sp>
-        <p:nvSpPr>
-          <p:cNvPr id="10" name="R10"/>
-          <p:cNvSpPr/>
-          <p:nvPr/>
-        </p:nvSpPr>
-        <p:spPr>
-          <a:xfrm>
-            <a:off x="4661692" y="1360000"/>
-            <a:ext cx="1900000" cy="1010000"/>
-          </a:xfrm>
-          <a:prstGeom prst="roundRect">
-            <a:avLst>
-              <a:gd name="adj" fmla="val 10526"/>
-            </a:avLst>
-          </a:prstGeom>
-          <a:solidFill>
-            <a:srgbClr val="F1ECFB"/>
-          </a:solidFill>
-          <a:ln/>
-          <a:effectLst>
-            <a:outerShdw sx="100000" sy="100000" kx="0" ky="0" algn="bl" rotWithShape="0" blurRad="101600" dist="25400" dir="5400000">
-              <a:srgbClr val="6B6392">
-                <a:alpha val="18000"/>
-              </a:srgbClr>
-            </a:outerShdw>
-          </a:effectLst>
-        </p:spPr>
-      </p:sp>
-      <p:sp>
-        <p:nvSpPr>
-          <p:cNvPr id="11" name="T11"/>
-          <p:cNvSpPr/>
-          <p:nvPr/>
-        </p:nvSpPr>
-        <p:spPr>
-          <a:xfrm>
-            <a:off x="4661692" y="1360000"/>
-            <a:ext cx="1900000" cy="1010000"/>
-          </a:xfrm>
-          <a:prstGeom prst="rect">
-            <a:avLst/>
-          </a:prstGeom>
-          <a:noFill/>
-          <a:ln/>
-        </p:spPr>
-        <p:txBody>
-          <a:bodyPr wrap="square" lIns="91440" tIns="45720" rIns="91440" bIns="45720" rtlCol="0" anchor="ctr"/>
-          <a:lstStyle/>
-          <a:p>
-            <a:pPr algn="ctr" indent="0" marL="0">
-              <a:lnSpc>
-                <a:spcPct val="95000"/>
-              </a:lnSpc>
-              <a:buNone/>
-            </a:pPr>
-            <a:r>
-              <a:rPr lang="pt-BR" sz="3200" b="1" dirty="0">
-                <a:solidFill>
-                  <a:srgbClr val="7C3AED"/>
-                </a:solidFill>
-                <a:latin typeface="Calibri" pitchFamily="34" charset="0"/>
-                <a:ea typeface="Calibri"/>
-                <a:cs typeface="Calibri"/>
-              </a:rPr>
-              <a:t>2</a:t>
-            </a:r>
-          </a:p>
-          <a:p>
-            <a:pPr algn="ctr" indent="0" marL="0">
-              <a:lnSpc>
-                <a:spcPct val="100000"/>
-              </a:lnSpc>
-              <a:spcBef>
-                <a:spcPts val="400"/>
-              </a:spcBef>
-              <a:buNone/>
-            </a:pPr>
-            <a:r>
-              <a:rPr lang="pt-BR" sz="1000" b="1" dirty="0">
-                <a:solidFill>
-                  <a:srgbClr val="241C3B"/>
-                </a:solidFill>
-                <a:latin typeface="Calibri" pitchFamily="34" charset="0"/>
-                <a:ea typeface="Calibri"/>
-                <a:cs typeface="Calibri"/>
-              </a:rPr>
-              <a:t>modelos: Cosseno e K-Means</a:t>
-            </a:r>
-          </a:p>
-        </p:txBody>
-      </p:sp>
-      <p:sp>
-        <p:nvSpPr>
-          <p:cNvPr id="12" name="R12"/>
-          <p:cNvSpPr/>
-          <p:nvPr/>
-        </p:nvSpPr>
-        <p:spPr>
-          <a:xfrm>
-            <a:off x="6741078" y="1360000"/>
-            <a:ext cx="1900000" cy="1010000"/>
-          </a:xfrm>
-          <a:prstGeom prst="roundRect">
-            <a:avLst>
-              <a:gd name="adj" fmla="val 10526"/>
-            </a:avLst>
-          </a:prstGeom>
-          <a:solidFill>
-            <a:srgbClr val="F1ECFB"/>
-          </a:solidFill>
-          <a:ln/>
-          <a:effectLst>
-            <a:outerShdw sx="100000" sy="100000" kx="0" ky="0" algn="bl" rotWithShape="0" blurRad="101600" dist="25400" dir="5400000">
-              <a:srgbClr val="6B6392">
-                <a:alpha val="18000"/>
-              </a:srgbClr>
-            </a:outerShdw>
-          </a:effectLst>
-        </p:spPr>
-      </p:sp>
-      <p:sp>
-        <p:nvSpPr>
-          <p:cNvPr id="13" name="T13"/>
-          <p:cNvSpPr/>
-          <p:nvPr/>
-        </p:nvSpPr>
-        <p:spPr>
-          <a:xfrm>
-            <a:off x="6741078" y="1360000"/>
-            <a:ext cx="1900000" cy="1010000"/>
-          </a:xfrm>
-          <a:prstGeom prst="rect">
-            <a:avLst/>
-          </a:prstGeom>
-          <a:noFill/>
-          <a:ln/>
-        </p:spPr>
-        <p:txBody>
-          <a:bodyPr wrap="square" lIns="91440" tIns="45720" rIns="91440" bIns="45720" rtlCol="0" anchor="ctr"/>
-          <a:lstStyle/>
-          <a:p>
-            <a:pPr algn="ctr" indent="0" marL="0">
-              <a:lnSpc>
-                <a:spcPct val="95000"/>
-              </a:lnSpc>
-              <a:buNone/>
-            </a:pPr>
-            <a:r>
-              <a:rPr lang="pt-BR" sz="3200" b="1" dirty="0">
-                <a:solidFill>
-                  <a:srgbClr val="7C3AED"/>
-                </a:solidFill>
-                <a:latin typeface="Calibri" pitchFamily="34" charset="0"/>
-                <a:ea typeface="Calibri"/>
-                <a:cs typeface="Calibri"/>
-              </a:rPr>
-              <a:t>3</a:t>
-            </a:r>
-          </a:p>
-          <a:p>
-            <a:pPr algn="ctr" indent="0" marL="0">
-              <a:lnSpc>
-                <a:spcPct val="100000"/>
-              </a:lnSpc>
-              <a:spcBef>
-                <a:spcPts val="400"/>
-              </a:spcBef>
-              <a:buNone/>
-            </a:pPr>
-            <a:r>
-              <a:rPr lang="pt-BR" sz="1000" b="1" dirty="0">
-                <a:solidFill>
-                  <a:srgbClr val="241C3B"/>
-                </a:solidFill>
-                <a:latin typeface="Calibri" pitchFamily="34" charset="0"/>
-                <a:ea typeface="Calibri"/>
-                <a:cs typeface="Calibri"/>
-              </a:rPr>
-              <a:t>painéis no app Streamlit</a:t>
-            </a:r>
-          </a:p>
-        </p:txBody>
-      </p:sp>
-      <p:sp>
-        <p:nvSpPr>
-          <p:cNvPr id="14" name="R14"/>
-          <p:cNvSpPr/>
-          <p:nvPr/>
-        </p:nvSpPr>
-        <p:spPr>
-          <a:xfrm>
-            <a:off x="502920" y="2560000"/>
-            <a:ext cx="8138160" cy="880000"/>
-          </a:xfrm>
-          <a:prstGeom prst="roundRect">
-            <a:avLst>
-              <a:gd name="adj" fmla="val 10526"/>
-            </a:avLst>
-          </a:prstGeom>
-          <a:solidFill>
-            <a:srgbClr val="E9E2F8"/>
-          </a:solidFill>
-          <a:ln/>
-        </p:spPr>
-      </p:sp>
-      <p:sp>
-        <p:nvSpPr>
-          <p:cNvPr id="15" name="T15"/>
-          <p:cNvSpPr/>
-          <p:nvPr/>
-        </p:nvSpPr>
-        <p:spPr>
-          <a:xfrm>
-            <a:off x="708660" y="2560000"/>
-            <a:ext cx="7726680" cy="880000"/>
+              <a:t>Sistema de Recomendação Musical</a:t>
+            </a:r>
+          </a:p>
+        </p:txBody>
+      </p:sp>
+      <p:sp>
+        <p:nvSpPr>
+          <p:cNvPr id="25" name="T25"/>
+          <p:cNvSpPr/>
+          <p:nvPr/>
+        </p:nvSpPr>
+        <p:spPr>
+          <a:xfrm>
+            <a:off x="475488" y="2542032"/>
+            <a:ext cx="8412480" cy="502920"/>
           </a:xfrm>
           <a:prstGeom prst="rect">
             <a:avLst/>
@@ -1329,24 +1397,10 @@
           <a:lstStyle/>
           <a:p>
             <a:pPr algn="l" indent="0" marL="0">
-              <a:lnSpc>
-                <a:spcPct val="106000"/>
-              </a:lnSpc>
-              <a:buNone/>
-            </a:pPr>
-            <a:r>
-              <a:rPr lang="pt-BR" sz="1300" b="1" dirty="0">
-                <a:solidFill>
-                  <a:srgbClr val="7C3AED"/>
-                </a:solidFill>
-                <a:latin typeface="Calibri" pitchFamily="34" charset="0"/>
-                <a:ea typeface="Calibri"/>
-                <a:cs typeface="Calibri"/>
-              </a:rPr>
-              <a:t>O que foi construído   </a:t>
-            </a:r>
-            <a:r>
-              <a:rPr lang="pt-BR" sz="1300" dirty="0">
+              <a:buNone/>
+            </a:pPr>
+            <a:r>
+              <a:rPr lang="pt-BR" sz="3000" dirty="0">
                 <a:solidFill>
                   <a:srgbClr val="241C3B"/>
                 </a:solidFill>
@@ -1354,21 +1408,54 @@
                 <a:ea typeface="Calibri"/>
                 <a:cs typeface="Calibri"/>
               </a:rPr>
-              <a:t>Aplicação em Python + Streamlit: o usuário escolhe de 1 a 5 faixas-semente, o sistema modela o centróide de preferência e retorna as Top-N faixas mais similares pelas características de áudio.</a:t>
-            </a:r>
-          </a:p>
-        </p:txBody>
-      </p:sp>
-      <p:sp>
-        <p:nvSpPr>
-          <p:cNvPr id="16" name="T16"/>
-          <p:cNvSpPr/>
-          <p:nvPr/>
-        </p:nvSpPr>
-        <p:spPr>
-          <a:xfrm>
-            <a:off x="502920" y="3620000"/>
-            <a:ext cx="3000000" cy="240000"/>
+              <a:t>para plataformas de </a:t>
+            </a:r>
+            <a:r>
+              <a:rPr lang="pt-BR" sz="3000" b="1" dirty="0">
+                <a:solidFill>
+                  <a:srgbClr val="DB2777"/>
+                </a:solidFill>
+                <a:latin typeface="Calibri" pitchFamily="34" charset="0"/>
+                <a:ea typeface="Calibri"/>
+                <a:cs typeface="Calibri"/>
+              </a:rPr>
+              <a:t>streaming</a:t>
+            </a:r>
+          </a:p>
+        </p:txBody>
+      </p:sp>
+      <p:sp>
+        <p:nvSpPr>
+          <p:cNvPr id="26" name="R26"/>
+          <p:cNvSpPr/>
+          <p:nvPr/>
+        </p:nvSpPr>
+        <p:spPr>
+          <a:xfrm>
+            <a:off x="502920" y="3383280"/>
+            <a:ext cx="2606040" cy="502920"/>
+          </a:xfrm>
+          <a:prstGeom prst="roundRect">
+            <a:avLst>
+              <a:gd name="adj" fmla="val 14545"/>
+            </a:avLst>
+          </a:prstGeom>
+          <a:solidFill>
+            <a:srgbClr val="F1ECFB"/>
+          </a:solidFill>
+          <a:ln/>
+        </p:spPr>
+      </p:sp>
+      <p:sp>
+        <p:nvSpPr>
+          <p:cNvPr id="27" name="T27"/>
+          <p:cNvSpPr/>
+          <p:nvPr/>
+        </p:nvSpPr>
+        <p:spPr>
+          <a:xfrm>
+            <a:off x="502920" y="3383280"/>
+            <a:ext cx="2606040" cy="502920"/>
           </a:xfrm>
           <a:prstGeom prst="rect">
             <a:avLst/>
@@ -1380,122 +1467,55 @@
           <a:bodyPr wrap="square" lIns="0" tIns="0" rIns="0" bIns="0" rtlCol="0" anchor="ctr"/>
           <a:lstStyle/>
           <a:p>
-            <a:pPr algn="l" indent="0" marL="0">
-              <a:buNone/>
-            </a:pPr>
-            <a:r>
-              <a:rPr lang="pt-BR" sz="1000" b="1" spc="150" kern="0" dirty="0">
-                <a:solidFill>
-                  <a:srgbClr val="6B6392"/>
-                </a:solidFill>
-                <a:latin typeface="Consolas" pitchFamily="34" charset="0"/>
-                <a:ea typeface="Consolas"/>
-                <a:cs typeface="Consolas"/>
-              </a:rPr>
-              <a:t>PIPELINE</a:t>
-            </a:r>
-          </a:p>
-        </p:txBody>
-      </p:sp>
-      <p:sp>
-        <p:nvSpPr>
-          <p:cNvPr id="17" name="R17"/>
-          <p:cNvSpPr/>
-          <p:nvPr/>
-        </p:nvSpPr>
-        <p:spPr>
-          <a:xfrm>
-            <a:off x="502920" y="3900000"/>
-            <a:ext cx="1700000" cy="760000"/>
-          </a:xfrm>
-          <a:prstGeom prst="roundRect">
-            <a:avLst>
-              <a:gd name="adj" fmla="val 10526"/>
+            <a:pPr algn="ctr" indent="0" marL="0">
+              <a:buNone/>
+            </a:pPr>
+            <a:r>
+              <a:rPr lang="pt-BR" sz="1250" b="1" dirty="0">
+                <a:solidFill>
+                  <a:srgbClr val="241C3B"/>
+                </a:solidFill>
+                <a:latin typeface="Calibri" pitchFamily="34" charset="0"/>
+                <a:ea typeface="Calibri"/>
+                <a:cs typeface="Calibri"/>
+              </a:rPr>
+              <a:t>Felipe Lazzarini Cunha</a:t>
+            </a:r>
+          </a:p>
+        </p:txBody>
+      </p:sp>
+      <p:sp>
+        <p:nvSpPr>
+          <p:cNvPr id="28" name="R28"/>
+          <p:cNvSpPr/>
+          <p:nvPr/>
+        </p:nvSpPr>
+        <p:spPr>
+          <a:xfrm>
+            <a:off x="3291840" y="3383280"/>
+            <a:ext cx="2606040" cy="502920"/>
+          </a:xfrm>
+          <a:prstGeom prst="roundRect">
+            <a:avLst>
+              <a:gd name="adj" fmla="val 14545"/>
             </a:avLst>
           </a:prstGeom>
           <a:solidFill>
             <a:srgbClr val="F1ECFB"/>
           </a:solidFill>
           <a:ln/>
-          <a:effectLst>
-            <a:outerShdw sx="100000" sy="100000" kx="0" ky="0" algn="bl" rotWithShape="0" blurRad="101600" dist="25400" dir="5400000">
-              <a:srgbClr val="6B6392">
-                <a:alpha val="18000"/>
-              </a:srgbClr>
-            </a:outerShdw>
-          </a:effectLst>
-        </p:spPr>
-      </p:sp>
-      <p:sp>
-        <p:nvSpPr>
-          <p:cNvPr id="18" name="T18"/>
-          <p:cNvSpPr/>
-          <p:nvPr/>
-        </p:nvSpPr>
-        <p:spPr>
-          <a:xfrm>
-            <a:off x="502920" y="3900000"/>
-            <a:ext cx="1700000" cy="760000"/>
-          </a:xfrm>
-          <a:prstGeom prst="rect">
-            <a:avLst/>
-          </a:prstGeom>
-          <a:noFill/>
-          <a:ln/>
-        </p:spPr>
-        <p:txBody>
-          <a:bodyPr wrap="square" lIns="45720" tIns="22860" rIns="45720" bIns="22860" rtlCol="0" anchor="ctr"/>
-          <a:lstStyle/>
-          <a:p>
-            <a:pPr algn="ctr" indent="0" marL="0">
-              <a:lnSpc>
-                <a:spcPct val="95000"/>
-              </a:lnSpc>
-              <a:buNone/>
-            </a:pPr>
-            <a:r>
-              <a:rPr lang="pt-BR" sz="1250" b="1" dirty="0">
-                <a:solidFill>
-                  <a:srgbClr val="241C3B"/>
-                </a:solidFill>
-                <a:latin typeface="Calibri" pitchFamily="34" charset="0"/>
-                <a:ea typeface="Calibri"/>
-                <a:cs typeface="Calibri"/>
-              </a:rPr>
-              <a:t>Faixas-semente</a:t>
-            </a:r>
-          </a:p>
-          <a:p>
-            <a:pPr algn="ctr" indent="0" marL="0">
-              <a:lnSpc>
-                <a:spcPct val="95000"/>
-              </a:lnSpc>
-              <a:buNone/>
-            </a:pPr>
-            <a:r>
-              <a:rPr lang="pt-BR" sz="1250" b="1" dirty="0">
-                <a:solidFill>
-                  <a:srgbClr val="241C3B"/>
-                </a:solidFill>
-                <a:latin typeface="Calibri" pitchFamily="34" charset="0"/>
-                <a:ea typeface="Calibri"/>
-                <a:cs typeface="Calibri"/>
-              </a:rPr>
-              <a:t>(1–5)</a:t>
-            </a:r>
-          </a:p>
-        </p:txBody>
-      </p:sp>
-      <p:sp>
-        <p:nvSpPr>
-          <p:cNvPr id="19" name="T19"/>
-          <p:cNvSpPr/>
-          <p:nvPr/>
-        </p:nvSpPr>
-        <p:spPr>
-          <a:xfrm>
-            <a:off x="2202920" y="3900000"/>
-            <a:ext cx="256032" cy="760000"/>
+        </p:spPr>
+      </p:sp>
+      <p:sp>
+        <p:nvSpPr>
+          <p:cNvPr id="29" name="T29"/>
+          <p:cNvSpPr/>
+          <p:nvPr/>
+        </p:nvSpPr>
+        <p:spPr>
+          <a:xfrm>
+            <a:off x="3291840" y="3383280"/>
+            <a:ext cx="2606040" cy="502920"/>
           </a:xfrm>
           <a:prstGeom prst="rect">
             <a:avLst/>
@@ -1511,118 +1531,51 @@
               <a:buNone/>
             </a:pPr>
             <a:r>
-              <a:rPr lang="pt-BR" sz="2400" b="1" dirty="0">
-                <a:solidFill>
-                  <a:srgbClr val="DB2777"/>
-                </a:solidFill>
-                <a:latin typeface="Calibri" pitchFamily="34" charset="0"/>
-                <a:ea typeface="Calibri"/>
-                <a:cs typeface="Calibri"/>
-              </a:rPr>
-              <a:t>›</a:t>
-            </a:r>
-          </a:p>
-        </p:txBody>
-      </p:sp>
-      <p:sp>
-        <p:nvSpPr>
-          <p:cNvPr id="20" name="R20"/>
-          <p:cNvSpPr/>
-          <p:nvPr/>
-        </p:nvSpPr>
-        <p:spPr>
-          <a:xfrm>
-            <a:off x="2458952" y="3900000"/>
-            <a:ext cx="1700000" cy="760000"/>
-          </a:xfrm>
-          <a:prstGeom prst="roundRect">
-            <a:avLst>
-              <a:gd name="adj" fmla="val 10526"/>
+              <a:rPr lang="pt-BR" sz="1250" b="1" dirty="0">
+                <a:solidFill>
+                  <a:srgbClr val="241C3B"/>
+                </a:solidFill>
+                <a:latin typeface="Calibri" pitchFamily="34" charset="0"/>
+                <a:ea typeface="Calibri"/>
+                <a:cs typeface="Calibri"/>
+              </a:rPr>
+              <a:t>Lucas Castro Carvalho</a:t>
+            </a:r>
+          </a:p>
+        </p:txBody>
+      </p:sp>
+      <p:sp>
+        <p:nvSpPr>
+          <p:cNvPr id="30" name="R30"/>
+          <p:cNvSpPr/>
+          <p:nvPr/>
+        </p:nvSpPr>
+        <p:spPr>
+          <a:xfrm>
+            <a:off x="6080760" y="3383280"/>
+            <a:ext cx="2606040" cy="502920"/>
+          </a:xfrm>
+          <a:prstGeom prst="roundRect">
+            <a:avLst>
+              <a:gd name="adj" fmla="val 14545"/>
             </a:avLst>
           </a:prstGeom>
           <a:solidFill>
             <a:srgbClr val="F1ECFB"/>
           </a:solidFill>
           <a:ln/>
-          <a:effectLst>
-            <a:outerShdw sx="100000" sy="100000" kx="0" ky="0" algn="bl" rotWithShape="0" blurRad="101600" dist="25400" dir="5400000">
-              <a:srgbClr val="6B6392">
-                <a:alpha val="18000"/>
-              </a:srgbClr>
-            </a:outerShdw>
-          </a:effectLst>
-        </p:spPr>
-      </p:sp>
-      <p:sp>
-        <p:nvSpPr>
-          <p:cNvPr id="21" name="T21"/>
-          <p:cNvSpPr/>
-          <p:nvPr/>
-        </p:nvSpPr>
-        <p:spPr>
-          <a:xfrm>
-            <a:off x="2458952" y="3900000"/>
-            <a:ext cx="1700000" cy="760000"/>
-          </a:xfrm>
-          <a:prstGeom prst="rect">
-            <a:avLst/>
-          </a:prstGeom>
-          <a:noFill/>
-          <a:ln/>
-        </p:spPr>
-        <p:txBody>
-          <a:bodyPr wrap="square" lIns="45720" tIns="22860" rIns="45720" bIns="22860" rtlCol="0" anchor="ctr"/>
-          <a:lstStyle/>
-          <a:p>
-            <a:pPr algn="ctr" indent="0" marL="0">
-              <a:lnSpc>
-                <a:spcPct val="95000"/>
-              </a:lnSpc>
-              <a:buNone/>
-            </a:pPr>
-            <a:r>
-              <a:rPr lang="pt-BR" sz="1250" b="1" dirty="0">
-                <a:solidFill>
-                  <a:srgbClr val="241C3B"/>
-                </a:solidFill>
-                <a:latin typeface="Calibri" pitchFamily="34" charset="0"/>
-                <a:ea typeface="Calibri"/>
-                <a:cs typeface="Calibri"/>
-              </a:rPr>
-              <a:t>Centróide</a:t>
-            </a:r>
-          </a:p>
-          <a:p>
-            <a:pPr algn="ctr" indent="0" marL="0">
-              <a:lnSpc>
-                <a:spcPct val="95000"/>
-              </a:lnSpc>
-              <a:buNone/>
-            </a:pPr>
-            <a:r>
-              <a:rPr lang="pt-BR" sz="1250" b="1" dirty="0">
-                <a:solidFill>
-                  <a:srgbClr val="241C3B"/>
-                </a:solidFill>
-                <a:latin typeface="Calibri" pitchFamily="34" charset="0"/>
-                <a:ea typeface="Calibri"/>
-                <a:cs typeface="Calibri"/>
-              </a:rPr>
-              <a:t>do perfil</a:t>
-            </a:r>
-          </a:p>
-        </p:txBody>
-      </p:sp>
-      <p:sp>
-        <p:nvSpPr>
-          <p:cNvPr id="22" name="T22"/>
-          <p:cNvSpPr/>
-          <p:nvPr/>
-        </p:nvSpPr>
-        <p:spPr>
-          <a:xfrm>
-            <a:off x="4158952" y="3900000"/>
-            <a:ext cx="256032" cy="760000"/>
+        </p:spPr>
+      </p:sp>
+      <p:sp>
+        <p:nvSpPr>
+          <p:cNvPr id="31" name="T31"/>
+          <p:cNvSpPr/>
+          <p:nvPr/>
+        </p:nvSpPr>
+        <p:spPr>
+          <a:xfrm>
+            <a:off x="6080760" y="3383280"/>
+            <a:ext cx="2606040" cy="502920"/>
           </a:xfrm>
           <a:prstGeom prst="rect">
             <a:avLst/>
@@ -1638,76 +1591,6 @@
               <a:buNone/>
             </a:pPr>
             <a:r>
-              <a:rPr lang="pt-BR" sz="2400" b="1" dirty="0">
-                <a:solidFill>
-                  <a:srgbClr val="DB2777"/>
-                </a:solidFill>
-                <a:latin typeface="Calibri" pitchFamily="34" charset="0"/>
-                <a:ea typeface="Calibri"/>
-                <a:cs typeface="Calibri"/>
-              </a:rPr>
-              <a:t>›</a:t>
-            </a:r>
-          </a:p>
-        </p:txBody>
-      </p:sp>
-      <p:sp>
-        <p:nvSpPr>
-          <p:cNvPr id="23" name="R23"/>
-          <p:cNvSpPr/>
-          <p:nvPr/>
-        </p:nvSpPr>
-        <p:spPr>
-          <a:xfrm>
-            <a:off x="4414984" y="3900000"/>
-            <a:ext cx="1880000" cy="760000"/>
-          </a:xfrm>
-          <a:prstGeom prst="roundRect">
-            <a:avLst>
-              <a:gd name="adj" fmla="val 10526"/>
-            </a:avLst>
-          </a:prstGeom>
-          <a:solidFill>
-            <a:srgbClr val="F1ECFB"/>
-          </a:solidFill>
-          <a:ln/>
-          <a:effectLst>
-            <a:outerShdw sx="100000" sy="100000" kx="0" ky="0" algn="bl" rotWithShape="0" blurRad="101600" dist="25400" dir="5400000">
-              <a:srgbClr val="6B6392">
-                <a:alpha val="18000"/>
-              </a:srgbClr>
-            </a:outerShdw>
-          </a:effectLst>
-        </p:spPr>
-      </p:sp>
-      <p:sp>
-        <p:nvSpPr>
-          <p:cNvPr id="24" name="T24"/>
-          <p:cNvSpPr/>
-          <p:nvPr/>
-        </p:nvSpPr>
-        <p:spPr>
-          <a:xfrm>
-            <a:off x="4414984" y="3900000"/>
-            <a:ext cx="1880000" cy="760000"/>
-          </a:xfrm>
-          <a:prstGeom prst="rect">
-            <a:avLst/>
-          </a:prstGeom>
-          <a:noFill/>
-          <a:ln/>
-        </p:spPr>
-        <p:txBody>
-          <a:bodyPr wrap="square" lIns="45720" tIns="22860" rIns="45720" bIns="22860" rtlCol="0" anchor="ctr"/>
-          <a:lstStyle/>
-          <a:p>
-            <a:pPr algn="ctr" indent="0" marL="0">
-              <a:lnSpc>
-                <a:spcPct val="95000"/>
-              </a:lnSpc>
-              <a:buNone/>
-            </a:pPr>
-            <a:r>
               <a:rPr lang="pt-BR" sz="1250" b="1" dirty="0">
                 <a:solidFill>
                   <a:srgbClr val="241C3B"/>
@@ -1716,40 +1599,21 @@
                 <a:ea typeface="Calibri"/>
                 <a:cs typeface="Calibri"/>
               </a:rPr>
-              <a:t>Cosseno /</a:t>
-            </a:r>
-          </a:p>
-          <a:p>
-            <a:pPr algn="ctr" indent="0" marL="0">
-              <a:lnSpc>
-                <a:spcPct val="95000"/>
-              </a:lnSpc>
-              <a:buNone/>
-            </a:pPr>
-            <a:r>
-              <a:rPr lang="pt-BR" sz="1250" b="1" dirty="0">
-                <a:solidFill>
-                  <a:srgbClr val="241C3B"/>
-                </a:solidFill>
-                <a:latin typeface="Calibri" pitchFamily="34" charset="0"/>
-                <a:ea typeface="Calibri"/>
-                <a:cs typeface="Calibri"/>
-              </a:rPr>
-              <a:t>K-Means</a:t>
-            </a:r>
-          </a:p>
-        </p:txBody>
-      </p:sp>
-      <p:sp>
-        <p:nvSpPr>
-          <p:cNvPr id="25" name="T25"/>
-          <p:cNvSpPr/>
-          <p:nvPr/>
-        </p:nvSpPr>
-        <p:spPr>
-          <a:xfrm>
-            <a:off x="6294984" y="3900000"/>
-            <a:ext cx="256032" cy="760000"/>
+              <a:t>Pedro Detoni Pereira</a:t>
+            </a:r>
+          </a:p>
+        </p:txBody>
+      </p:sp>
+      <p:sp>
+        <p:nvSpPr>
+          <p:cNvPr id="32" name="T32"/>
+          <p:cNvSpPr/>
+          <p:nvPr/>
+        </p:nvSpPr>
+        <p:spPr>
+          <a:xfrm>
+            <a:off x="502920" y="4069080"/>
+            <a:ext cx="8229600" cy="274320"/>
           </a:xfrm>
           <a:prstGeom prst="rect">
             <a:avLst/>
@@ -1761,108 +1625,19 @@
           <a:bodyPr wrap="square" lIns="0" tIns="0" rIns="0" bIns="0" rtlCol="0" anchor="ctr"/>
           <a:lstStyle/>
           <a:p>
-            <a:pPr algn="ctr" indent="0" marL="0">
-              <a:buNone/>
-            </a:pPr>
-            <a:r>
-              <a:rPr lang="pt-BR" sz="2400" b="1" dirty="0">
-                <a:solidFill>
-                  <a:srgbClr val="DB2777"/>
-                </a:solidFill>
-                <a:latin typeface="Calibri" pitchFamily="34" charset="0"/>
-                <a:ea typeface="Calibri"/>
-                <a:cs typeface="Calibri"/>
-              </a:rPr>
-              <a:t>›</a:t>
-            </a:r>
-          </a:p>
-        </p:txBody>
-      </p:sp>
-      <p:sp>
-        <p:nvSpPr>
-          <p:cNvPr id="26" name="R26"/>
-          <p:cNvSpPr/>
-          <p:nvPr/>
-        </p:nvSpPr>
-        <p:spPr>
-          <a:xfrm>
-            <a:off x="6551016" y="3900000"/>
-            <a:ext cx="1700000" cy="760000"/>
-          </a:xfrm>
-          <a:prstGeom prst="roundRect">
-            <a:avLst>
-              <a:gd name="adj" fmla="val 10526"/>
-            </a:avLst>
-          </a:prstGeom>
-          <a:solidFill>
-            <a:srgbClr val="F1ECFB"/>
-          </a:solidFill>
-          <a:ln/>
-          <a:effectLst>
-            <a:outerShdw sx="100000" sy="100000" kx="0" ky="0" algn="bl" rotWithShape="0" blurRad="101600" dist="25400" dir="5400000">
-              <a:srgbClr val="6B6392">
-                <a:alpha val="18000"/>
-              </a:srgbClr>
-            </a:outerShdw>
-          </a:effectLst>
-        </p:spPr>
-      </p:sp>
-      <p:sp>
-        <p:nvSpPr>
-          <p:cNvPr id="27" name="T27"/>
-          <p:cNvSpPr/>
-          <p:nvPr/>
-        </p:nvSpPr>
-        <p:spPr>
-          <a:xfrm>
-            <a:off x="6551016" y="3900000"/>
-            <a:ext cx="1700000" cy="760000"/>
-          </a:xfrm>
-          <a:prstGeom prst="rect">
-            <a:avLst/>
-          </a:prstGeom>
-          <a:noFill/>
-          <a:ln/>
-        </p:spPr>
-        <p:txBody>
-          <a:bodyPr wrap="square" lIns="45720" tIns="22860" rIns="45720" bIns="22860" rtlCol="0" anchor="ctr"/>
-          <a:lstStyle/>
-          <a:p>
-            <a:pPr algn="ctr" indent="0" marL="0">
-              <a:lnSpc>
-                <a:spcPct val="95000"/>
-              </a:lnSpc>
-              <a:buNone/>
-            </a:pPr>
-            <a:r>
-              <a:rPr lang="pt-BR" sz="1250" b="1" dirty="0">
-                <a:solidFill>
-                  <a:srgbClr val="241C3B"/>
-                </a:solidFill>
-                <a:latin typeface="Calibri" pitchFamily="34" charset="0"/>
-                <a:ea typeface="Calibri"/>
-                <a:cs typeface="Calibri"/>
-              </a:rPr>
-              <a:t>Top-N</a:t>
-            </a:r>
-          </a:p>
-          <a:p>
-            <a:pPr algn="ctr" indent="0" marL="0">
-              <a:lnSpc>
-                <a:spcPct val="95000"/>
-              </a:lnSpc>
-              <a:buNone/>
-            </a:pPr>
-            <a:r>
-              <a:rPr lang="pt-BR" sz="1250" b="1" dirty="0">
-                <a:solidFill>
-                  <a:srgbClr val="241C3B"/>
-                </a:solidFill>
-                <a:latin typeface="Calibri" pitchFamily="34" charset="0"/>
-                <a:ea typeface="Calibri"/>
-                <a:cs typeface="Calibri"/>
-              </a:rPr>
-              <a:t>recomendações</a:t>
+            <a:pPr algn="l" indent="0" marL="0">
+              <a:buNone/>
+            </a:pPr>
+            <a:r>
+              <a:rPr lang="pt-BR" sz="1100" dirty="0">
+                <a:solidFill>
+                  <a:srgbClr val="6B6392"/>
+                </a:solidFill>
+                <a:latin typeface="Calibri" pitchFamily="34" charset="0"/>
+                <a:ea typeface="Calibri"/>
+                <a:cs typeface="Calibri"/>
+              </a:rPr>
+              <a:t>Sistemas de Apoio à Decisão  ·  DCC166 — 2026.1  ·  Prof. Wagner Arbex  ·  DCC / UFJF</a:t>
             </a:r>
           </a:p>
         </p:txBody>
@@ -1984,7 +1759,7 @@
                 <a:ea typeface="Consolas"/>
                 <a:cs typeface="Consolas"/>
               </a:rPr>
-              <a:t>08 — RESULTADOS</a:t>
+              <a:t>07 — IMPLEMENTAÇÃO</a:t>
             </a:r>
           </a:p>
         </p:txBody>
@@ -2022,7 +1797,7 @@
                 <a:ea typeface="Calibri"/>
                 <a:cs typeface="Calibri"/>
               </a:rPr>
-              <a:t>O que os números mostram</a:t>
+              <a:t>O protótipo construído</a:t>
             </a:r>
           </a:p>
         </p:txBody>
@@ -2036,7 +1811,7 @@
         <p:spPr>
           <a:xfrm>
             <a:off x="502920" y="1360000"/>
-            <a:ext cx="3450000" cy="880000"/>
+            <a:ext cx="1900000" cy="1010000"/>
           </a:xfrm>
           <a:prstGeom prst="roundRect">
             <a:avLst>
@@ -2065,7 +1840,7 @@
         <p:spPr>
           <a:xfrm>
             <a:off x="502920" y="1360000"/>
-            <a:ext cx="3450000" cy="880000"/>
+            <a:ext cx="1900000" cy="1010000"/>
           </a:xfrm>
           <a:prstGeom prst="rect">
             <a:avLst/>
@@ -2074,17 +1849,17 @@
           <a:ln/>
         </p:spPr>
         <p:txBody>
-          <a:bodyPr wrap="square" lIns="228600" tIns="68580" rIns="228600" bIns="68580" rtlCol="0" anchor="ctr"/>
+          <a:bodyPr wrap="square" lIns="91440" tIns="45720" rIns="91440" bIns="45720" rtlCol="0" anchor="ctr"/>
           <a:lstStyle/>
           <a:p>
-            <a:pPr algn="l" indent="0" marL="0">
+            <a:pPr algn="ctr" indent="0" marL="0">
               <a:lnSpc>
                 <a:spcPct val="95000"/>
               </a:lnSpc>
               <a:buNone/>
             </a:pPr>
             <a:r>
-              <a:rPr lang="pt-BR" sz="2000" b="1" dirty="0">
+              <a:rPr lang="pt-BR" sz="2400" b="1" dirty="0">
                 <a:solidFill>
                   <a:srgbClr val="7C3AED"/>
                 </a:solidFill>
@@ -2092,21 +1867,21 @@
                 <a:ea typeface="Calibri"/>
                 <a:cs typeface="Calibri"/>
               </a:rPr>
-              <a:t>ILS ≈ 0,90</a:t>
-            </a:r>
-          </a:p>
-          <a:p>
-            <a:pPr algn="l" indent="0" marL="0">
+              <a:t>89.740</a:t>
+            </a:r>
+          </a:p>
+          <a:p>
+            <a:pPr algn="ctr" indent="0" marL="0">
               <a:lnSpc>
                 <a:spcPct val="100000"/>
               </a:lnSpc>
               <a:spcBef>
-                <a:spcPts val="300"/>
+                <a:spcPts val="400"/>
               </a:spcBef>
               <a:buNone/>
             </a:pPr>
             <a:r>
-              <a:rPr lang="pt-BR" sz="1050" b="1" dirty="0">
+              <a:rPr lang="pt-BR" sz="1000" b="1" dirty="0">
                 <a:solidFill>
                   <a:srgbClr val="241C3B"/>
                 </a:solidFill>
@@ -2114,7 +1889,7 @@
                 <a:ea typeface="Calibri"/>
                 <a:cs typeface="Calibri"/>
               </a:rPr>
-              <a:t>diversidade intra-lista: listas coesas</a:t>
+              <a:t>faixas no catálogo efetivo</a:t>
             </a:r>
           </a:p>
         </p:txBody>
@@ -2127,8 +1902,8 @@
         </p:nvSpPr>
         <p:spPr>
           <a:xfrm>
-            <a:off x="502920" y="2350000"/>
-            <a:ext cx="3450000" cy="880000"/>
+            <a:off x="2582306" y="1360000"/>
+            <a:ext cx="1900000" cy="1010000"/>
           </a:xfrm>
           <a:prstGeom prst="roundRect">
             <a:avLst>
@@ -2156,8 +1931,8 @@
         </p:nvSpPr>
         <p:spPr>
           <a:xfrm>
-            <a:off x="502920" y="2350000"/>
-            <a:ext cx="3450000" cy="880000"/>
+            <a:off x="2582306" y="1360000"/>
+            <a:ext cx="1900000" cy="1010000"/>
           </a:xfrm>
           <a:prstGeom prst="rect">
             <a:avLst/>
@@ -2166,17 +1941,17 @@
           <a:ln/>
         </p:spPr>
         <p:txBody>
-          <a:bodyPr wrap="square" lIns="228600" tIns="68580" rIns="228600" bIns="68580" rtlCol="0" anchor="ctr"/>
+          <a:bodyPr wrap="square" lIns="91440" tIns="45720" rIns="91440" bIns="45720" rtlCol="0" anchor="ctr"/>
           <a:lstStyle/>
           <a:p>
-            <a:pPr algn="l" indent="0" marL="0">
+            <a:pPr algn="ctr" indent="0" marL="0">
               <a:lnSpc>
                 <a:spcPct val="95000"/>
               </a:lnSpc>
               <a:buNone/>
             </a:pPr>
             <a:r>
-              <a:rPr lang="pt-BR" sz="1700" b="1" dirty="0">
+              <a:rPr lang="pt-BR" sz="3200" b="1" dirty="0">
                 <a:solidFill>
                   <a:srgbClr val="7C3AED"/>
                 </a:solidFill>
@@ -2184,21 +1959,21 @@
                 <a:ea typeface="Calibri"/>
                 <a:cs typeface="Calibri"/>
               </a:rPr>
-              <a:t>Cosseno ≈ K-Means</a:t>
-            </a:r>
-          </a:p>
-          <a:p>
-            <a:pPr algn="l" indent="0" marL="0">
+              <a:t>11</a:t>
+            </a:r>
+          </a:p>
+          <a:p>
+            <a:pPr algn="ctr" indent="0" marL="0">
               <a:lnSpc>
                 <a:spcPct val="100000"/>
               </a:lnSpc>
               <a:spcBef>
-                <a:spcPts val="300"/>
+                <a:spcPts val="400"/>
               </a:spcBef>
               <a:buNone/>
             </a:pPr>
             <a:r>
-              <a:rPr lang="pt-BR" sz="1050" b="1" dirty="0">
+              <a:rPr lang="pt-BR" sz="1000" b="1" dirty="0">
                 <a:solidFill>
                   <a:srgbClr val="241C3B"/>
                 </a:solidFill>
@@ -2206,7 +1981,7 @@
                 <a:ea typeface="Calibri"/>
                 <a:cs typeface="Calibri"/>
               </a:rPr>
-              <a:t>desempenho praticamente equivalente</a:t>
+              <a:t>features de áudio · z-score</a:t>
             </a:r>
           </a:p>
         </p:txBody>
@@ -2219,8 +1994,8 @@
         </p:nvSpPr>
         <p:spPr>
           <a:xfrm>
-            <a:off x="502920" y="3340000"/>
-            <a:ext cx="3450000" cy="880000"/>
+            <a:off x="4661692" y="1360000"/>
+            <a:ext cx="1900000" cy="1010000"/>
           </a:xfrm>
           <a:prstGeom prst="roundRect">
             <a:avLst>
@@ -2248,8 +2023,8 @@
         </p:nvSpPr>
         <p:spPr>
           <a:xfrm>
-            <a:off x="502920" y="3340000"/>
-            <a:ext cx="3450000" cy="880000"/>
+            <a:off x="4661692" y="1360000"/>
+            <a:ext cx="1900000" cy="1010000"/>
           </a:xfrm>
           <a:prstGeom prst="rect">
             <a:avLst/>
@@ -2258,17 +2033,17 @@
           <a:ln/>
         </p:spPr>
         <p:txBody>
-          <a:bodyPr wrap="square" lIns="228600" tIns="68580" rIns="228600" bIns="68580" rtlCol="0" anchor="ctr"/>
+          <a:bodyPr wrap="square" lIns="91440" tIns="45720" rIns="91440" bIns="45720" rtlCol="0" anchor="ctr"/>
           <a:lstStyle/>
           <a:p>
-            <a:pPr algn="l" indent="0" marL="0">
+            <a:pPr algn="ctr" indent="0" marL="0">
               <a:lnSpc>
                 <a:spcPct val="95000"/>
               </a:lnSpc>
               <a:buNone/>
             </a:pPr>
             <a:r>
-              <a:rPr lang="pt-BR" sz="1900" b="1" dirty="0">
+              <a:rPr lang="pt-BR" sz="3200" b="1" dirty="0">
                 <a:solidFill>
                   <a:srgbClr val="7C3AED"/>
                 </a:solidFill>
@@ -2276,21 +2051,21 @@
                 <a:ea typeface="Calibri"/>
                 <a:cs typeface="Calibri"/>
               </a:rPr>
-              <a:t>ótimo em K = 8</a:t>
-            </a:r>
-          </a:p>
-          <a:p>
-            <a:pPr algn="l" indent="0" marL="0">
+              <a:t>2</a:t>
+            </a:r>
+          </a:p>
+          <a:p>
+            <a:pPr algn="ctr" indent="0" marL="0">
               <a:lnSpc>
                 <a:spcPct val="100000"/>
               </a:lnSpc>
               <a:spcBef>
-                <a:spcPts val="300"/>
+                <a:spcPts val="400"/>
               </a:spcBef>
               <a:buNone/>
             </a:pPr>
             <a:r>
-              <a:rPr lang="pt-BR" sz="1050" b="1" dirty="0">
+              <a:rPr lang="pt-BR" sz="1000" b="1" dirty="0">
                 <a:solidFill>
                   <a:srgbClr val="241C3B"/>
                 </a:solidFill>
@@ -2298,7 +2073,7 @@
                 <a:ea typeface="Calibri"/>
                 <a:cs typeface="Calibri"/>
               </a:rPr>
-              <a:t>silhueta 0,147 — estrutura fraca, porém real</a:t>
+              <a:t>modelos: Cosseno e K-Means</a:t>
             </a:r>
           </a:p>
         </p:txBody>
@@ -2311,8 +2086,8 @@
         </p:nvSpPr>
         <p:spPr>
           <a:xfrm>
-            <a:off x="4260000" y="1360000"/>
-            <a:ext cx="4381080" cy="2860000"/>
+            <a:off x="6741078" y="1360000"/>
+            <a:ext cx="1900000" cy="1010000"/>
           </a:xfrm>
           <a:prstGeom prst="roundRect">
             <a:avLst>
@@ -2320,14 +2095,9 @@
             </a:avLst>
           </a:prstGeom>
           <a:solidFill>
-            <a:srgbClr val="FFFFFF"/>
-          </a:solidFill>
-          <a:ln w="12700">
-            <a:solidFill>
-              <a:srgbClr val="F1ECFB"/>
-            </a:solidFill>
-            <a:prstDash val="solid"/>
-          </a:ln>
+            <a:srgbClr val="F1ECFB"/>
+          </a:solidFill>
+          <a:ln/>
           <a:effectLst>
             <a:outerShdw sx="100000" sy="100000" kx="0" ky="0" algn="bl" rotWithShape="0" blurRad="101600" dist="25400" dir="5400000">
               <a:srgbClr val="6B6392">
@@ -2345,8 +2115,8 @@
         </p:nvSpPr>
         <p:spPr>
           <a:xfrm>
-            <a:off x="4488600" y="1520000"/>
-            <a:ext cx="3923880" cy="300000"/>
+            <a:off x="6741078" y="1360000"/>
+            <a:ext cx="1900000" cy="1010000"/>
           </a:xfrm>
           <a:prstGeom prst="rect">
             <a:avLst/>
@@ -2355,14 +2125,17 @@
           <a:ln/>
         </p:spPr>
         <p:txBody>
-          <a:bodyPr wrap="square" lIns="0" tIns="0" rIns="0" bIns="0" rtlCol="0" anchor="ctr"/>
+          <a:bodyPr wrap="square" lIns="91440" tIns="45720" rIns="91440" bIns="45720" rtlCol="0" anchor="ctr"/>
           <a:lstStyle/>
           <a:p>
-            <a:pPr algn="l" indent="0" marL="0">
-              <a:buNone/>
-            </a:pPr>
-            <a:r>
-              <a:rPr lang="pt-BR" sz="1350" b="1" dirty="0">
+            <a:pPr algn="ctr" indent="0" marL="0">
+              <a:lnSpc>
+                <a:spcPct val="95000"/>
+              </a:lnSpc>
+              <a:buNone/>
+            </a:pPr>
+            <a:r>
+              <a:rPr lang="pt-BR" sz="3200" b="1" dirty="0">
                 <a:solidFill>
                   <a:srgbClr val="7C3AED"/>
                 </a:solidFill>
@@ -2370,48 +2143,54 @@
                 <a:ea typeface="Calibri"/>
                 <a:cs typeface="Calibri"/>
               </a:rPr>
-              <a:t>Precisão de Gênero@10</a:t>
-            </a:r>
-          </a:p>
-        </p:txBody>
-      </p:sp>
-      <p:sp>
-        <p:nvSpPr>
-          <p:cNvPr id="14" name="T14"/>
-          <p:cNvSpPr/>
-          <p:nvPr/>
-        </p:nvSpPr>
-        <p:spPr>
-          <a:xfrm>
-            <a:off x="4488600" y="1830000"/>
-            <a:ext cx="3923880" cy="240000"/>
-          </a:xfrm>
-          <a:prstGeom prst="rect">
-            <a:avLst/>
-          </a:prstGeom>
-          <a:noFill/>
-          <a:ln/>
-        </p:spPr>
-        <p:txBody>
-          <a:bodyPr wrap="square" lIns="0" tIns="0" rIns="0" bIns="0" rtlCol="0" anchor="ctr"/>
-          <a:lstStyle/>
-          <a:p>
-            <a:pPr algn="l" indent="0" marL="0">
-              <a:buNone/>
-            </a:pPr>
-            <a:r>
-              <a:rPr lang="pt-BR" sz="1000" i="1" dirty="0">
-                <a:solidFill>
-                  <a:srgbClr val="6B6392"/>
-                </a:solidFill>
-                <a:latin typeface="Calibri" pitchFamily="34" charset="0"/>
-                <a:ea typeface="Calibri"/>
-                <a:cs typeface="Calibri"/>
-              </a:rPr>
-              <a:t>linha de base (acaso) = 0,88%</a:t>
-            </a:r>
-          </a:p>
-        </p:txBody>
+              <a:t>3</a:t>
+            </a:r>
+          </a:p>
+          <a:p>
+            <a:pPr algn="ctr" indent="0" marL="0">
+              <a:lnSpc>
+                <a:spcPct val="100000"/>
+              </a:lnSpc>
+              <a:spcBef>
+                <a:spcPts val="400"/>
+              </a:spcBef>
+              <a:buNone/>
+            </a:pPr>
+            <a:r>
+              <a:rPr lang="pt-BR" sz="1000" b="1" dirty="0">
+                <a:solidFill>
+                  <a:srgbClr val="241C3B"/>
+                </a:solidFill>
+                <a:latin typeface="Calibri" pitchFamily="34" charset="0"/>
+                <a:ea typeface="Calibri"/>
+                <a:cs typeface="Calibri"/>
+              </a:rPr>
+              <a:t>painéis no app Streamlit</a:t>
+            </a:r>
+          </a:p>
+        </p:txBody>
+      </p:sp>
+      <p:sp>
+        <p:nvSpPr>
+          <p:cNvPr id="14" name="R14"/>
+          <p:cNvSpPr/>
+          <p:nvPr/>
+        </p:nvSpPr>
+        <p:spPr>
+          <a:xfrm>
+            <a:off x="502920" y="2560000"/>
+            <a:ext cx="8138160" cy="880000"/>
+          </a:xfrm>
+          <a:prstGeom prst="roundRect">
+            <a:avLst>
+              <a:gd name="adj" fmla="val 10526"/>
+            </a:avLst>
+          </a:prstGeom>
+          <a:solidFill>
+            <a:srgbClr val="E9E2F8"/>
+          </a:solidFill>
+          <a:ln/>
+        </p:spPr>
       </p:sp>
       <p:sp>
         <p:nvSpPr>
@@ -2421,685 +2200,8 @@
         </p:nvSpPr>
         <p:spPr>
           <a:xfrm>
-            <a:off x="4488600" y="2180000"/>
-            <a:ext cx="880000" cy="300000"/>
-          </a:xfrm>
-          <a:prstGeom prst="rect">
-            <a:avLst/>
-          </a:prstGeom>
-          <a:noFill/>
-          <a:ln/>
-        </p:spPr>
-        <p:txBody>
-          <a:bodyPr wrap="square" lIns="0" tIns="0" rIns="0" bIns="0" rtlCol="0" anchor="ctr"/>
-          <a:lstStyle/>
-          <a:p>
-            <a:pPr algn="l" indent="0" marL="0">
-              <a:buNone/>
-            </a:pPr>
-            <a:r>
-              <a:rPr lang="pt-BR" sz="1100" b="1" dirty="0">
-                <a:solidFill>
-                  <a:srgbClr val="241C3B"/>
-                </a:solidFill>
-                <a:latin typeface="Calibri" pitchFamily="34" charset="0"/>
-                <a:ea typeface="Calibri"/>
-                <a:cs typeface="Calibri"/>
-              </a:rPr>
-              <a:t>Clássica</a:t>
-            </a:r>
-          </a:p>
-        </p:txBody>
-      </p:sp>
-      <p:sp>
-        <p:nvSpPr>
-          <p:cNvPr id="16" name="R16"/>
-          <p:cNvSpPr/>
-          <p:nvPr/>
-        </p:nvSpPr>
-        <p:spPr>
-          <a:xfrm>
-            <a:off x="5368600" y="2238000"/>
-            <a:ext cx="1740000" cy="184000"/>
-          </a:xfrm>
-          <a:prstGeom prst="roundRect">
-            <a:avLst>
-              <a:gd name="adj" fmla="val 50000"/>
-            </a:avLst>
-          </a:prstGeom>
-          <a:solidFill>
-            <a:srgbClr val="EDE7FB"/>
-          </a:solidFill>
-          <a:ln/>
-        </p:spPr>
-      </p:sp>
-      <p:sp>
-        <p:nvSpPr>
-          <p:cNvPr id="17" name="R17"/>
-          <p:cNvSpPr/>
-          <p:nvPr/>
-        </p:nvSpPr>
-        <p:spPr>
-          <a:xfrm>
-            <a:off x="5368600" y="2238000"/>
-            <a:ext cx="1740000" cy="184000"/>
-          </a:xfrm>
-          <a:prstGeom prst="roundRect">
-            <a:avLst>
-              <a:gd name="adj" fmla="val 50000"/>
-            </a:avLst>
-          </a:prstGeom>
-          <a:solidFill>
-            <a:srgbClr val="7C3AED"/>
-          </a:solidFill>
-          <a:ln/>
-        </p:spPr>
-      </p:sp>
-      <p:sp>
-        <p:nvSpPr>
-          <p:cNvPr id="18" name="T18"/>
-          <p:cNvSpPr/>
-          <p:nvPr/>
-        </p:nvSpPr>
-        <p:spPr>
-          <a:xfrm>
-            <a:off x="7178600" y="2180000"/>
-            <a:ext cx="1322480" cy="300000"/>
-          </a:xfrm>
-          <a:prstGeom prst="rect">
-            <a:avLst/>
-          </a:prstGeom>
-          <a:noFill/>
-          <a:ln/>
-        </p:spPr>
-        <p:txBody>
-          <a:bodyPr wrap="square" lIns="0" tIns="0" rIns="0" bIns="0" rtlCol="0" anchor="ctr"/>
-          <a:lstStyle/>
-          <a:p>
-            <a:pPr algn="l" indent="0" marL="0">
-              <a:buNone/>
-            </a:pPr>
-            <a:r>
-              <a:rPr lang="pt-BR" sz="1100" b="1" dirty="0">
-                <a:solidFill>
-                  <a:srgbClr val="241C3B"/>
-                </a:solidFill>
-                <a:latin typeface="Calibri" pitchFamily="34" charset="0"/>
-                <a:ea typeface="Calibri"/>
-                <a:cs typeface="Calibri"/>
-              </a:rPr>
-              <a:t>25,0%  </a:t>
-            </a:r>
-            <a:r>
-              <a:rPr lang="pt-BR" sz="900" dirty="0">
-                <a:solidFill>
-                  <a:srgbClr val="6B6392"/>
-                </a:solidFill>
-                <a:latin typeface="Calibri" pitchFamily="34" charset="0"/>
-                <a:ea typeface="Calibri"/>
-                <a:cs typeface="Calibri"/>
-              </a:rPr>
-              <a:t>28×</a:t>
-            </a:r>
-          </a:p>
-        </p:txBody>
-      </p:sp>
-      <p:sp>
-        <p:nvSpPr>
-          <p:cNvPr id="19" name="T19"/>
-          <p:cNvSpPr/>
-          <p:nvPr/>
-        </p:nvSpPr>
-        <p:spPr>
-          <a:xfrm>
-            <a:off x="4488600" y="2580000"/>
-            <a:ext cx="880000" cy="300000"/>
-          </a:xfrm>
-          <a:prstGeom prst="rect">
-            <a:avLst/>
-          </a:prstGeom>
-          <a:noFill/>
-          <a:ln/>
-        </p:spPr>
-        <p:txBody>
-          <a:bodyPr wrap="square" lIns="0" tIns="0" rIns="0" bIns="0" rtlCol="0" anchor="ctr"/>
-          <a:lstStyle/>
-          <a:p>
-            <a:pPr algn="l" indent="0" marL="0">
-              <a:buNone/>
-            </a:pPr>
-            <a:r>
-              <a:rPr lang="pt-BR" sz="1100" b="1" dirty="0">
-                <a:solidFill>
-                  <a:srgbClr val="241C3B"/>
-                </a:solidFill>
-                <a:latin typeface="Calibri" pitchFamily="34" charset="0"/>
-                <a:ea typeface="Calibri"/>
-                <a:cs typeface="Calibri"/>
-              </a:rPr>
-              <a:t>Rock</a:t>
-            </a:r>
-          </a:p>
-        </p:txBody>
-      </p:sp>
-      <p:sp>
-        <p:nvSpPr>
-          <p:cNvPr id="20" name="R20"/>
-          <p:cNvSpPr/>
-          <p:nvPr/>
-        </p:nvSpPr>
-        <p:spPr>
-          <a:xfrm>
-            <a:off x="5368600" y="2638000"/>
-            <a:ext cx="1740000" cy="184000"/>
-          </a:xfrm>
-          <a:prstGeom prst="roundRect">
-            <a:avLst>
-              <a:gd name="adj" fmla="val 50000"/>
-            </a:avLst>
-          </a:prstGeom>
-          <a:solidFill>
-            <a:srgbClr val="EDE7FB"/>
-          </a:solidFill>
-          <a:ln/>
-        </p:spPr>
-      </p:sp>
-      <p:sp>
-        <p:nvSpPr>
-          <p:cNvPr id="21" name="R21"/>
-          <p:cNvSpPr/>
-          <p:nvPr/>
-        </p:nvSpPr>
-        <p:spPr>
-          <a:xfrm>
-            <a:off x="5368600" y="2638000"/>
-            <a:ext cx="626400" cy="184000"/>
-          </a:xfrm>
-          <a:prstGeom prst="roundRect">
-            <a:avLst>
-              <a:gd name="adj" fmla="val 50000"/>
-            </a:avLst>
-          </a:prstGeom>
-          <a:solidFill>
-            <a:srgbClr val="7C3AED"/>
-          </a:solidFill>
-          <a:ln/>
-        </p:spPr>
-      </p:sp>
-      <p:sp>
-        <p:nvSpPr>
-          <p:cNvPr id="22" name="T22"/>
-          <p:cNvSpPr/>
-          <p:nvPr/>
-        </p:nvSpPr>
-        <p:spPr>
-          <a:xfrm>
-            <a:off x="7178600" y="2580000"/>
-            <a:ext cx="1322480" cy="300000"/>
-          </a:xfrm>
-          <a:prstGeom prst="rect">
-            <a:avLst/>
-          </a:prstGeom>
-          <a:noFill/>
-          <a:ln/>
-        </p:spPr>
-        <p:txBody>
-          <a:bodyPr wrap="square" lIns="0" tIns="0" rIns="0" bIns="0" rtlCol="0" anchor="ctr"/>
-          <a:lstStyle/>
-          <a:p>
-            <a:pPr algn="l" indent="0" marL="0">
-              <a:buNone/>
-            </a:pPr>
-            <a:r>
-              <a:rPr lang="pt-BR" sz="1100" b="1" dirty="0">
-                <a:solidFill>
-                  <a:srgbClr val="241C3B"/>
-                </a:solidFill>
-                <a:latin typeface="Calibri" pitchFamily="34" charset="0"/>
-                <a:ea typeface="Calibri"/>
-                <a:cs typeface="Calibri"/>
-              </a:rPr>
-              <a:t>9,0%  </a:t>
-            </a:r>
-            <a:r>
-              <a:rPr lang="pt-BR" sz="900" dirty="0">
-                <a:solidFill>
-                  <a:srgbClr val="6B6392"/>
-                </a:solidFill>
-                <a:latin typeface="Calibri" pitchFamily="34" charset="0"/>
-                <a:ea typeface="Calibri"/>
-                <a:cs typeface="Calibri"/>
-              </a:rPr>
-              <a:t>10×</a:t>
-            </a:r>
-          </a:p>
-        </p:txBody>
-      </p:sp>
-      <p:sp>
-        <p:nvSpPr>
-          <p:cNvPr id="23" name="T23"/>
-          <p:cNvSpPr/>
-          <p:nvPr/>
-        </p:nvSpPr>
-        <p:spPr>
-          <a:xfrm>
-            <a:off x="4488600" y="2980000"/>
-            <a:ext cx="880000" cy="300000"/>
-          </a:xfrm>
-          <a:prstGeom prst="rect">
-            <a:avLst/>
-          </a:prstGeom>
-          <a:noFill/>
-          <a:ln/>
-        </p:spPr>
-        <p:txBody>
-          <a:bodyPr wrap="square" lIns="0" tIns="0" rIns="0" bIns="0" rtlCol="0" anchor="ctr"/>
-          <a:lstStyle/>
-          <a:p>
-            <a:pPr algn="l" indent="0" marL="0">
-              <a:buNone/>
-            </a:pPr>
-            <a:r>
-              <a:rPr lang="pt-BR" sz="1100" b="1" dirty="0">
-                <a:solidFill>
-                  <a:srgbClr val="241C3B"/>
-                </a:solidFill>
-                <a:latin typeface="Calibri" pitchFamily="34" charset="0"/>
-                <a:ea typeface="Calibri"/>
-                <a:cs typeface="Calibri"/>
-              </a:rPr>
-              <a:t>Pop</a:t>
-            </a:r>
-          </a:p>
-        </p:txBody>
-      </p:sp>
-      <p:sp>
-        <p:nvSpPr>
-          <p:cNvPr id="24" name="R24"/>
-          <p:cNvSpPr/>
-          <p:nvPr/>
-        </p:nvSpPr>
-        <p:spPr>
-          <a:xfrm>
-            <a:off x="5368600" y="3038000"/>
-            <a:ext cx="1740000" cy="184000"/>
-          </a:xfrm>
-          <a:prstGeom prst="roundRect">
-            <a:avLst>
-              <a:gd name="adj" fmla="val 50000"/>
-            </a:avLst>
-          </a:prstGeom>
-          <a:solidFill>
-            <a:srgbClr val="EDE7FB"/>
-          </a:solidFill>
-          <a:ln/>
-        </p:spPr>
-      </p:sp>
-      <p:sp>
-        <p:nvSpPr>
-          <p:cNvPr id="25" name="R25"/>
-          <p:cNvSpPr/>
-          <p:nvPr/>
-        </p:nvSpPr>
-        <p:spPr>
-          <a:xfrm>
-            <a:off x="5368600" y="3038000"/>
-            <a:ext cx="382800" cy="184000"/>
-          </a:xfrm>
-          <a:prstGeom prst="roundRect">
-            <a:avLst>
-              <a:gd name="adj" fmla="val 50000"/>
-            </a:avLst>
-          </a:prstGeom>
-          <a:solidFill>
-            <a:srgbClr val="7C3AED"/>
-          </a:solidFill>
-          <a:ln/>
-        </p:spPr>
-      </p:sp>
-      <p:sp>
-        <p:nvSpPr>
-          <p:cNvPr id="26" name="T26"/>
-          <p:cNvSpPr/>
-          <p:nvPr/>
-        </p:nvSpPr>
-        <p:spPr>
-          <a:xfrm>
-            <a:off x="7178600" y="2980000"/>
-            <a:ext cx="1322480" cy="300000"/>
-          </a:xfrm>
-          <a:prstGeom prst="rect">
-            <a:avLst/>
-          </a:prstGeom>
-          <a:noFill/>
-          <a:ln/>
-        </p:spPr>
-        <p:txBody>
-          <a:bodyPr wrap="square" lIns="0" tIns="0" rIns="0" bIns="0" rtlCol="0" anchor="ctr"/>
-          <a:lstStyle/>
-          <a:p>
-            <a:pPr algn="l" indent="0" marL="0">
-              <a:buNone/>
-            </a:pPr>
-            <a:r>
-              <a:rPr lang="pt-BR" sz="1100" b="1" dirty="0">
-                <a:solidFill>
-                  <a:srgbClr val="241C3B"/>
-                </a:solidFill>
-                <a:latin typeface="Calibri" pitchFamily="34" charset="0"/>
-                <a:ea typeface="Calibri"/>
-                <a:cs typeface="Calibri"/>
-              </a:rPr>
-              <a:t>5,5%  </a:t>
-            </a:r>
-            <a:r>
-              <a:rPr lang="pt-BR" sz="900" dirty="0">
-                <a:solidFill>
-                  <a:srgbClr val="6B6392"/>
-                </a:solidFill>
-                <a:latin typeface="Calibri" pitchFamily="34" charset="0"/>
-                <a:ea typeface="Calibri"/>
-                <a:cs typeface="Calibri"/>
-              </a:rPr>
-              <a:t>6×</a:t>
-            </a:r>
-          </a:p>
-        </p:txBody>
-      </p:sp>
-      <p:sp>
-        <p:nvSpPr>
-          <p:cNvPr id="27" name="T27"/>
-          <p:cNvSpPr/>
-          <p:nvPr/>
-        </p:nvSpPr>
-        <p:spPr>
-          <a:xfrm>
-            <a:off x="4488600" y="3380000"/>
-            <a:ext cx="880000" cy="300000"/>
-          </a:xfrm>
-          <a:prstGeom prst="rect">
-            <a:avLst/>
-          </a:prstGeom>
-          <a:noFill/>
-          <a:ln/>
-        </p:spPr>
-        <p:txBody>
-          <a:bodyPr wrap="square" lIns="0" tIns="0" rIns="0" bIns="0" rtlCol="0" anchor="ctr"/>
-          <a:lstStyle/>
-          <a:p>
-            <a:pPr algn="l" indent="0" marL="0">
-              <a:buNone/>
-            </a:pPr>
-            <a:r>
-              <a:rPr lang="pt-BR" sz="1100" b="1" dirty="0">
-                <a:solidFill>
-                  <a:srgbClr val="241C3B"/>
-                </a:solidFill>
-                <a:latin typeface="Calibri" pitchFamily="34" charset="0"/>
-                <a:ea typeface="Calibri"/>
-                <a:cs typeface="Calibri"/>
-              </a:rPr>
-              <a:t>Metal</a:t>
-            </a:r>
-          </a:p>
-        </p:txBody>
-      </p:sp>
-      <p:sp>
-        <p:nvSpPr>
-          <p:cNvPr id="28" name="R28"/>
-          <p:cNvSpPr/>
-          <p:nvPr/>
-        </p:nvSpPr>
-        <p:spPr>
-          <a:xfrm>
-            <a:off x="5368600" y="3438000"/>
-            <a:ext cx="1740000" cy="184000"/>
-          </a:xfrm>
-          <a:prstGeom prst="roundRect">
-            <a:avLst>
-              <a:gd name="adj" fmla="val 50000"/>
-            </a:avLst>
-          </a:prstGeom>
-          <a:solidFill>
-            <a:srgbClr val="EDE7FB"/>
-          </a:solidFill>
-          <a:ln/>
-        </p:spPr>
-      </p:sp>
-      <p:sp>
-        <p:nvSpPr>
-          <p:cNvPr id="29" name="R29"/>
-          <p:cNvSpPr/>
-          <p:nvPr/>
-        </p:nvSpPr>
-        <p:spPr>
-          <a:xfrm>
-            <a:off x="5368600" y="3438000"/>
-            <a:ext cx="104400" cy="184000"/>
-          </a:xfrm>
-          <a:prstGeom prst="roundRect">
-            <a:avLst>
-              <a:gd name="adj" fmla="val 50000"/>
-            </a:avLst>
-          </a:prstGeom>
-          <a:solidFill>
-            <a:srgbClr val="7C3AED"/>
-          </a:solidFill>
-          <a:ln/>
-        </p:spPr>
-      </p:sp>
-      <p:sp>
-        <p:nvSpPr>
-          <p:cNvPr id="30" name="T30"/>
-          <p:cNvSpPr/>
-          <p:nvPr/>
-        </p:nvSpPr>
-        <p:spPr>
-          <a:xfrm>
-            <a:off x="7178600" y="3380000"/>
-            <a:ext cx="1322480" cy="300000"/>
-          </a:xfrm>
-          <a:prstGeom prst="rect">
-            <a:avLst/>
-          </a:prstGeom>
-          <a:noFill/>
-          <a:ln/>
-        </p:spPr>
-        <p:txBody>
-          <a:bodyPr wrap="square" lIns="0" tIns="0" rIns="0" bIns="0" rtlCol="0" anchor="ctr"/>
-          <a:lstStyle/>
-          <a:p>
-            <a:pPr algn="l" indent="0" marL="0">
-              <a:buNone/>
-            </a:pPr>
-            <a:r>
-              <a:rPr lang="pt-BR" sz="1100" b="1" dirty="0">
-                <a:solidFill>
-                  <a:srgbClr val="241C3B"/>
-                </a:solidFill>
-                <a:latin typeface="Calibri" pitchFamily="34" charset="0"/>
-                <a:ea typeface="Calibri"/>
-                <a:cs typeface="Calibri"/>
-              </a:rPr>
-              <a:t>1,5%  </a:t>
-            </a:r>
-            <a:r>
-              <a:rPr lang="pt-BR" sz="900" dirty="0">
-                <a:solidFill>
-                  <a:srgbClr val="6B6392"/>
-                </a:solidFill>
-                <a:latin typeface="Calibri" pitchFamily="34" charset="0"/>
-                <a:ea typeface="Calibri"/>
-                <a:cs typeface="Calibri"/>
-              </a:rPr>
-              <a:t>1,7×</a:t>
-            </a:r>
-          </a:p>
-        </p:txBody>
-      </p:sp>
-      <p:sp>
-        <p:nvSpPr>
-          <p:cNvPr id="31" name="T31"/>
-          <p:cNvSpPr/>
-          <p:nvPr/>
-        </p:nvSpPr>
-        <p:spPr>
-          <a:xfrm>
-            <a:off x="4488600" y="3780000"/>
-            <a:ext cx="880000" cy="300000"/>
-          </a:xfrm>
-          <a:prstGeom prst="rect">
-            <a:avLst/>
-          </a:prstGeom>
-          <a:noFill/>
-          <a:ln/>
-        </p:spPr>
-        <p:txBody>
-          <a:bodyPr wrap="square" lIns="0" tIns="0" rIns="0" bIns="0" rtlCol="0" anchor="ctr"/>
-          <a:lstStyle/>
-          <a:p>
-            <a:pPr algn="l" indent="0" marL="0">
-              <a:buNone/>
-            </a:pPr>
-            <a:r>
-              <a:rPr lang="pt-BR" sz="1100" b="1" dirty="0">
-                <a:solidFill>
-                  <a:srgbClr val="241C3B"/>
-                </a:solidFill>
-                <a:latin typeface="Calibri" pitchFamily="34" charset="0"/>
-                <a:ea typeface="Calibri"/>
-                <a:cs typeface="Calibri"/>
-              </a:rPr>
-              <a:t>Jazz</a:t>
-            </a:r>
-          </a:p>
-        </p:txBody>
-      </p:sp>
-      <p:sp>
-        <p:nvSpPr>
-          <p:cNvPr id="32" name="R32"/>
-          <p:cNvSpPr/>
-          <p:nvPr/>
-        </p:nvSpPr>
-        <p:spPr>
-          <a:xfrm>
-            <a:off x="5368600" y="3838000"/>
-            <a:ext cx="1740000" cy="184000"/>
-          </a:xfrm>
-          <a:prstGeom prst="roundRect">
-            <a:avLst>
-              <a:gd name="adj" fmla="val 50000"/>
-            </a:avLst>
-          </a:prstGeom>
-          <a:solidFill>
-            <a:srgbClr val="EDE7FB"/>
-          </a:solidFill>
-          <a:ln/>
-        </p:spPr>
-      </p:sp>
-      <p:sp>
-        <p:nvSpPr>
-          <p:cNvPr id="33" name="R33"/>
-          <p:cNvSpPr/>
-          <p:nvPr/>
-        </p:nvSpPr>
-        <p:spPr>
-          <a:xfrm>
-            <a:off x="5368600" y="3838000"/>
-            <a:ext cx="60000" cy="184000"/>
-          </a:xfrm>
-          <a:prstGeom prst="roundRect">
-            <a:avLst>
-              <a:gd name="adj" fmla="val 50000"/>
-            </a:avLst>
-          </a:prstGeom>
-          <a:solidFill>
-            <a:srgbClr val="7C3AED"/>
-          </a:solidFill>
-          <a:ln/>
-        </p:spPr>
-      </p:sp>
-      <p:sp>
-        <p:nvSpPr>
-          <p:cNvPr id="34" name="T34"/>
-          <p:cNvSpPr/>
-          <p:nvPr/>
-        </p:nvSpPr>
-        <p:spPr>
-          <a:xfrm>
-            <a:off x="7178600" y="3780000"/>
-            <a:ext cx="1322480" cy="300000"/>
-          </a:xfrm>
-          <a:prstGeom prst="rect">
-            <a:avLst/>
-          </a:prstGeom>
-          <a:noFill/>
-          <a:ln/>
-        </p:spPr>
-        <p:txBody>
-          <a:bodyPr wrap="square" lIns="0" tIns="0" rIns="0" bIns="0" rtlCol="0" anchor="ctr"/>
-          <a:lstStyle/>
-          <a:p>
-            <a:pPr algn="l" indent="0" marL="0">
-              <a:buNone/>
-            </a:pPr>
-            <a:r>
-              <a:rPr lang="pt-BR" sz="1100" b="1" dirty="0">
-                <a:solidFill>
-                  <a:srgbClr val="241C3B"/>
-                </a:solidFill>
-                <a:latin typeface="Calibri" pitchFamily="34" charset="0"/>
-                <a:ea typeface="Calibri"/>
-                <a:cs typeface="Calibri"/>
-              </a:rPr>
-              <a:t>0,5%  </a:t>
-            </a:r>
-            <a:r>
-              <a:rPr lang="pt-BR" sz="900" dirty="0">
-                <a:solidFill>
-                  <a:srgbClr val="6B6392"/>
-                </a:solidFill>
-                <a:latin typeface="Calibri" pitchFamily="34" charset="0"/>
-                <a:ea typeface="Calibri"/>
-                <a:cs typeface="Calibri"/>
-              </a:rPr>
-              <a:t>0,6×</a:t>
-            </a:r>
-          </a:p>
-        </p:txBody>
-      </p:sp>
-      <p:sp>
-        <p:nvSpPr>
-          <p:cNvPr id="35" name="R35"/>
-          <p:cNvSpPr/>
-          <p:nvPr/>
-        </p:nvSpPr>
-        <p:spPr>
-          <a:xfrm>
-            <a:off x="502920" y="4330000"/>
-            <a:ext cx="8138160" cy="650000"/>
-          </a:xfrm>
-          <a:prstGeom prst="roundRect">
-            <a:avLst>
-              <a:gd name="adj" fmla="val 10526"/>
-            </a:avLst>
-          </a:prstGeom>
-          <a:solidFill>
-            <a:srgbClr val="E9E2F8"/>
-          </a:solidFill>
-          <a:ln/>
-        </p:spPr>
-      </p:sp>
-      <p:sp>
-        <p:nvSpPr>
-          <p:cNvPr id="36" name="T36"/>
-          <p:cNvSpPr/>
-          <p:nvPr/>
-        </p:nvSpPr>
-        <p:spPr>
-          <a:xfrm>
-            <a:off x="708660" y="4330000"/>
-            <a:ext cx="7726680" cy="650000"/>
+            <a:off x="708660" y="2560000"/>
+            <a:ext cx="7726680" cy="880000"/>
           </a:xfrm>
           <a:prstGeom prst="rect">
             <a:avLst/>
@@ -3126,7 +2228,7 @@
                 <a:ea typeface="Calibri"/>
                 <a:cs typeface="Calibri"/>
               </a:rPr>
-              <a:t>Leitura   </a:t>
+              <a:t>O que foi construído   </a:t>
             </a:r>
             <a:r>
               <a:rPr lang="pt-BR" sz="1300" dirty="0">
@@ -3137,7 +2239,515 @@
                 <a:ea typeface="Calibri"/>
                 <a:cs typeface="Calibri"/>
               </a:rPr>
-              <a:t>o áudio carrega sinal de gênero, mas os 113 gêneros finos se sobrepõem — só estilos distintivos (clássica) atingem alta precisão.</a:t>
+              <a:t>Aplicação em Python + Streamlit: o usuário escolhe de 1 a 5 faixas-semente, o sistema modela o centróide de preferência e retorna as Top-N faixas mais similares pelas características de áudio.</a:t>
+            </a:r>
+          </a:p>
+        </p:txBody>
+      </p:sp>
+      <p:sp>
+        <p:nvSpPr>
+          <p:cNvPr id="16" name="T16"/>
+          <p:cNvSpPr/>
+          <p:nvPr/>
+        </p:nvSpPr>
+        <p:spPr>
+          <a:xfrm>
+            <a:off x="502920" y="3620000"/>
+            <a:ext cx="3000000" cy="240000"/>
+          </a:xfrm>
+          <a:prstGeom prst="rect">
+            <a:avLst/>
+          </a:prstGeom>
+          <a:noFill/>
+          <a:ln/>
+        </p:spPr>
+        <p:txBody>
+          <a:bodyPr wrap="square" lIns="0" tIns="0" rIns="0" bIns="0" rtlCol="0" anchor="ctr"/>
+          <a:lstStyle/>
+          <a:p>
+            <a:pPr algn="l" indent="0" marL="0">
+              <a:buNone/>
+            </a:pPr>
+            <a:r>
+              <a:rPr lang="pt-BR" sz="1000" b="1" spc="150" kern="0" dirty="0">
+                <a:solidFill>
+                  <a:srgbClr val="6B6392"/>
+                </a:solidFill>
+                <a:latin typeface="Consolas" pitchFamily="34" charset="0"/>
+                <a:ea typeface="Consolas"/>
+                <a:cs typeface="Consolas"/>
+              </a:rPr>
+              <a:t>PIPELINE</a:t>
+            </a:r>
+          </a:p>
+        </p:txBody>
+      </p:sp>
+      <p:sp>
+        <p:nvSpPr>
+          <p:cNvPr id="17" name="R17"/>
+          <p:cNvSpPr/>
+          <p:nvPr/>
+        </p:nvSpPr>
+        <p:spPr>
+          <a:xfrm>
+            <a:off x="502920" y="3900000"/>
+            <a:ext cx="1700000" cy="760000"/>
+          </a:xfrm>
+          <a:prstGeom prst="roundRect">
+            <a:avLst>
+              <a:gd name="adj" fmla="val 10526"/>
+            </a:avLst>
+          </a:prstGeom>
+          <a:solidFill>
+            <a:srgbClr val="F1ECFB"/>
+          </a:solidFill>
+          <a:ln/>
+          <a:effectLst>
+            <a:outerShdw sx="100000" sy="100000" kx="0" ky="0" algn="bl" rotWithShape="0" blurRad="101600" dist="25400" dir="5400000">
+              <a:srgbClr val="6B6392">
+                <a:alpha val="18000"/>
+              </a:srgbClr>
+            </a:outerShdw>
+          </a:effectLst>
+        </p:spPr>
+      </p:sp>
+      <p:sp>
+        <p:nvSpPr>
+          <p:cNvPr id="18" name="T18"/>
+          <p:cNvSpPr/>
+          <p:nvPr/>
+        </p:nvSpPr>
+        <p:spPr>
+          <a:xfrm>
+            <a:off x="502920" y="3900000"/>
+            <a:ext cx="1700000" cy="760000"/>
+          </a:xfrm>
+          <a:prstGeom prst="rect">
+            <a:avLst/>
+          </a:prstGeom>
+          <a:noFill/>
+          <a:ln/>
+        </p:spPr>
+        <p:txBody>
+          <a:bodyPr wrap="square" lIns="45720" tIns="22860" rIns="45720" bIns="22860" rtlCol="0" anchor="ctr"/>
+          <a:lstStyle/>
+          <a:p>
+            <a:pPr algn="ctr" indent="0" marL="0">
+              <a:lnSpc>
+                <a:spcPct val="95000"/>
+              </a:lnSpc>
+              <a:buNone/>
+            </a:pPr>
+            <a:r>
+              <a:rPr lang="pt-BR" sz="1250" b="1" dirty="0">
+                <a:solidFill>
+                  <a:srgbClr val="241C3B"/>
+                </a:solidFill>
+                <a:latin typeface="Calibri" pitchFamily="34" charset="0"/>
+                <a:ea typeface="Calibri"/>
+                <a:cs typeface="Calibri"/>
+              </a:rPr>
+              <a:t>Faixas-semente</a:t>
+            </a:r>
+          </a:p>
+          <a:p>
+            <a:pPr algn="ctr" indent="0" marL="0">
+              <a:lnSpc>
+                <a:spcPct val="95000"/>
+              </a:lnSpc>
+              <a:buNone/>
+            </a:pPr>
+            <a:r>
+              <a:rPr lang="pt-BR" sz="1250" b="1" dirty="0">
+                <a:solidFill>
+                  <a:srgbClr val="241C3B"/>
+                </a:solidFill>
+                <a:latin typeface="Calibri" pitchFamily="34" charset="0"/>
+                <a:ea typeface="Calibri"/>
+                <a:cs typeface="Calibri"/>
+              </a:rPr>
+              <a:t>(1–5)</a:t>
+            </a:r>
+          </a:p>
+        </p:txBody>
+      </p:sp>
+      <p:sp>
+        <p:nvSpPr>
+          <p:cNvPr id="19" name="T19"/>
+          <p:cNvSpPr/>
+          <p:nvPr/>
+        </p:nvSpPr>
+        <p:spPr>
+          <a:xfrm>
+            <a:off x="2202920" y="3900000"/>
+            <a:ext cx="256032" cy="760000"/>
+          </a:xfrm>
+          <a:prstGeom prst="rect">
+            <a:avLst/>
+          </a:prstGeom>
+          <a:noFill/>
+          <a:ln/>
+        </p:spPr>
+        <p:txBody>
+          <a:bodyPr wrap="square" lIns="0" tIns="0" rIns="0" bIns="0" rtlCol="0" anchor="ctr"/>
+          <a:lstStyle/>
+          <a:p>
+            <a:pPr algn="ctr" indent="0" marL="0">
+              <a:buNone/>
+            </a:pPr>
+            <a:r>
+              <a:rPr lang="pt-BR" sz="2400" b="1" dirty="0">
+                <a:solidFill>
+                  <a:srgbClr val="DB2777"/>
+                </a:solidFill>
+                <a:latin typeface="Calibri" pitchFamily="34" charset="0"/>
+                <a:ea typeface="Calibri"/>
+                <a:cs typeface="Calibri"/>
+              </a:rPr>
+              <a:t>›</a:t>
+            </a:r>
+          </a:p>
+        </p:txBody>
+      </p:sp>
+      <p:sp>
+        <p:nvSpPr>
+          <p:cNvPr id="20" name="R20"/>
+          <p:cNvSpPr/>
+          <p:nvPr/>
+        </p:nvSpPr>
+        <p:spPr>
+          <a:xfrm>
+            <a:off x="2458952" y="3900000"/>
+            <a:ext cx="1700000" cy="760000"/>
+          </a:xfrm>
+          <a:prstGeom prst="roundRect">
+            <a:avLst>
+              <a:gd name="adj" fmla="val 10526"/>
+            </a:avLst>
+          </a:prstGeom>
+          <a:solidFill>
+            <a:srgbClr val="F1ECFB"/>
+          </a:solidFill>
+          <a:ln/>
+          <a:effectLst>
+            <a:outerShdw sx="100000" sy="100000" kx="0" ky="0" algn="bl" rotWithShape="0" blurRad="101600" dist="25400" dir="5400000">
+              <a:srgbClr val="6B6392">
+                <a:alpha val="18000"/>
+              </a:srgbClr>
+            </a:outerShdw>
+          </a:effectLst>
+        </p:spPr>
+      </p:sp>
+      <p:sp>
+        <p:nvSpPr>
+          <p:cNvPr id="21" name="T21"/>
+          <p:cNvSpPr/>
+          <p:nvPr/>
+        </p:nvSpPr>
+        <p:spPr>
+          <a:xfrm>
+            <a:off x="2458952" y="3900000"/>
+            <a:ext cx="1700000" cy="760000"/>
+          </a:xfrm>
+          <a:prstGeom prst="rect">
+            <a:avLst/>
+          </a:prstGeom>
+          <a:noFill/>
+          <a:ln/>
+        </p:spPr>
+        <p:txBody>
+          <a:bodyPr wrap="square" lIns="45720" tIns="22860" rIns="45720" bIns="22860" rtlCol="0" anchor="ctr"/>
+          <a:lstStyle/>
+          <a:p>
+            <a:pPr algn="ctr" indent="0" marL="0">
+              <a:lnSpc>
+                <a:spcPct val="95000"/>
+              </a:lnSpc>
+              <a:buNone/>
+            </a:pPr>
+            <a:r>
+              <a:rPr lang="pt-BR" sz="1250" b="1" dirty="0">
+                <a:solidFill>
+                  <a:srgbClr val="241C3B"/>
+                </a:solidFill>
+                <a:latin typeface="Calibri" pitchFamily="34" charset="0"/>
+                <a:ea typeface="Calibri"/>
+                <a:cs typeface="Calibri"/>
+              </a:rPr>
+              <a:t>Centróide</a:t>
+            </a:r>
+          </a:p>
+          <a:p>
+            <a:pPr algn="ctr" indent="0" marL="0">
+              <a:lnSpc>
+                <a:spcPct val="95000"/>
+              </a:lnSpc>
+              <a:buNone/>
+            </a:pPr>
+            <a:r>
+              <a:rPr lang="pt-BR" sz="1250" b="1" dirty="0">
+                <a:solidFill>
+                  <a:srgbClr val="241C3B"/>
+                </a:solidFill>
+                <a:latin typeface="Calibri" pitchFamily="34" charset="0"/>
+                <a:ea typeface="Calibri"/>
+                <a:cs typeface="Calibri"/>
+              </a:rPr>
+              <a:t>do perfil</a:t>
+            </a:r>
+          </a:p>
+        </p:txBody>
+      </p:sp>
+      <p:sp>
+        <p:nvSpPr>
+          <p:cNvPr id="22" name="T22"/>
+          <p:cNvSpPr/>
+          <p:nvPr/>
+        </p:nvSpPr>
+        <p:spPr>
+          <a:xfrm>
+            <a:off x="4158952" y="3900000"/>
+            <a:ext cx="256032" cy="760000"/>
+          </a:xfrm>
+          <a:prstGeom prst="rect">
+            <a:avLst/>
+          </a:prstGeom>
+          <a:noFill/>
+          <a:ln/>
+        </p:spPr>
+        <p:txBody>
+          <a:bodyPr wrap="square" lIns="0" tIns="0" rIns="0" bIns="0" rtlCol="0" anchor="ctr"/>
+          <a:lstStyle/>
+          <a:p>
+            <a:pPr algn="ctr" indent="0" marL="0">
+              <a:buNone/>
+            </a:pPr>
+            <a:r>
+              <a:rPr lang="pt-BR" sz="2400" b="1" dirty="0">
+                <a:solidFill>
+                  <a:srgbClr val="DB2777"/>
+                </a:solidFill>
+                <a:latin typeface="Calibri" pitchFamily="34" charset="0"/>
+                <a:ea typeface="Calibri"/>
+                <a:cs typeface="Calibri"/>
+              </a:rPr>
+              <a:t>›</a:t>
+            </a:r>
+          </a:p>
+        </p:txBody>
+      </p:sp>
+      <p:sp>
+        <p:nvSpPr>
+          <p:cNvPr id="23" name="R23"/>
+          <p:cNvSpPr/>
+          <p:nvPr/>
+        </p:nvSpPr>
+        <p:spPr>
+          <a:xfrm>
+            <a:off x="4414984" y="3900000"/>
+            <a:ext cx="1880000" cy="760000"/>
+          </a:xfrm>
+          <a:prstGeom prst="roundRect">
+            <a:avLst>
+              <a:gd name="adj" fmla="val 10526"/>
+            </a:avLst>
+          </a:prstGeom>
+          <a:solidFill>
+            <a:srgbClr val="F1ECFB"/>
+          </a:solidFill>
+          <a:ln/>
+          <a:effectLst>
+            <a:outerShdw sx="100000" sy="100000" kx="0" ky="0" algn="bl" rotWithShape="0" blurRad="101600" dist="25400" dir="5400000">
+              <a:srgbClr val="6B6392">
+                <a:alpha val="18000"/>
+              </a:srgbClr>
+            </a:outerShdw>
+          </a:effectLst>
+        </p:spPr>
+      </p:sp>
+      <p:sp>
+        <p:nvSpPr>
+          <p:cNvPr id="24" name="T24"/>
+          <p:cNvSpPr/>
+          <p:nvPr/>
+        </p:nvSpPr>
+        <p:spPr>
+          <a:xfrm>
+            <a:off x="4414984" y="3900000"/>
+            <a:ext cx="1880000" cy="760000"/>
+          </a:xfrm>
+          <a:prstGeom prst="rect">
+            <a:avLst/>
+          </a:prstGeom>
+          <a:noFill/>
+          <a:ln/>
+        </p:spPr>
+        <p:txBody>
+          <a:bodyPr wrap="square" lIns="45720" tIns="22860" rIns="45720" bIns="22860" rtlCol="0" anchor="ctr"/>
+          <a:lstStyle/>
+          <a:p>
+            <a:pPr algn="ctr" indent="0" marL="0">
+              <a:lnSpc>
+                <a:spcPct val="95000"/>
+              </a:lnSpc>
+              <a:buNone/>
+            </a:pPr>
+            <a:r>
+              <a:rPr lang="pt-BR" sz="1250" b="1" dirty="0">
+                <a:solidFill>
+                  <a:srgbClr val="241C3B"/>
+                </a:solidFill>
+                <a:latin typeface="Calibri" pitchFamily="34" charset="0"/>
+                <a:ea typeface="Calibri"/>
+                <a:cs typeface="Calibri"/>
+              </a:rPr>
+              <a:t>Cosseno /</a:t>
+            </a:r>
+          </a:p>
+          <a:p>
+            <a:pPr algn="ctr" indent="0" marL="0">
+              <a:lnSpc>
+                <a:spcPct val="95000"/>
+              </a:lnSpc>
+              <a:buNone/>
+            </a:pPr>
+            <a:r>
+              <a:rPr lang="pt-BR" sz="1250" b="1" dirty="0">
+                <a:solidFill>
+                  <a:srgbClr val="241C3B"/>
+                </a:solidFill>
+                <a:latin typeface="Calibri" pitchFamily="34" charset="0"/>
+                <a:ea typeface="Calibri"/>
+                <a:cs typeface="Calibri"/>
+              </a:rPr>
+              <a:t>K-Means</a:t>
+            </a:r>
+          </a:p>
+        </p:txBody>
+      </p:sp>
+      <p:sp>
+        <p:nvSpPr>
+          <p:cNvPr id="25" name="T25"/>
+          <p:cNvSpPr/>
+          <p:nvPr/>
+        </p:nvSpPr>
+        <p:spPr>
+          <a:xfrm>
+            <a:off x="6294984" y="3900000"/>
+            <a:ext cx="256032" cy="760000"/>
+          </a:xfrm>
+          <a:prstGeom prst="rect">
+            <a:avLst/>
+          </a:prstGeom>
+          <a:noFill/>
+          <a:ln/>
+        </p:spPr>
+        <p:txBody>
+          <a:bodyPr wrap="square" lIns="0" tIns="0" rIns="0" bIns="0" rtlCol="0" anchor="ctr"/>
+          <a:lstStyle/>
+          <a:p>
+            <a:pPr algn="ctr" indent="0" marL="0">
+              <a:buNone/>
+            </a:pPr>
+            <a:r>
+              <a:rPr lang="pt-BR" sz="2400" b="1" dirty="0">
+                <a:solidFill>
+                  <a:srgbClr val="DB2777"/>
+                </a:solidFill>
+                <a:latin typeface="Calibri" pitchFamily="34" charset="0"/>
+                <a:ea typeface="Calibri"/>
+                <a:cs typeface="Calibri"/>
+              </a:rPr>
+              <a:t>›</a:t>
+            </a:r>
+          </a:p>
+        </p:txBody>
+      </p:sp>
+      <p:sp>
+        <p:nvSpPr>
+          <p:cNvPr id="26" name="R26"/>
+          <p:cNvSpPr/>
+          <p:nvPr/>
+        </p:nvSpPr>
+        <p:spPr>
+          <a:xfrm>
+            <a:off x="6551016" y="3900000"/>
+            <a:ext cx="1700000" cy="760000"/>
+          </a:xfrm>
+          <a:prstGeom prst="roundRect">
+            <a:avLst>
+              <a:gd name="adj" fmla="val 10526"/>
+            </a:avLst>
+          </a:prstGeom>
+          <a:solidFill>
+            <a:srgbClr val="F1ECFB"/>
+          </a:solidFill>
+          <a:ln/>
+          <a:effectLst>
+            <a:outerShdw sx="100000" sy="100000" kx="0" ky="0" algn="bl" rotWithShape="0" blurRad="101600" dist="25400" dir="5400000">
+              <a:srgbClr val="6B6392">
+                <a:alpha val="18000"/>
+              </a:srgbClr>
+            </a:outerShdw>
+          </a:effectLst>
+        </p:spPr>
+      </p:sp>
+      <p:sp>
+        <p:nvSpPr>
+          <p:cNvPr id="27" name="T27"/>
+          <p:cNvSpPr/>
+          <p:nvPr/>
+        </p:nvSpPr>
+        <p:spPr>
+          <a:xfrm>
+            <a:off x="6551016" y="3900000"/>
+            <a:ext cx="1700000" cy="760000"/>
+          </a:xfrm>
+          <a:prstGeom prst="rect">
+            <a:avLst/>
+          </a:prstGeom>
+          <a:noFill/>
+          <a:ln/>
+        </p:spPr>
+        <p:txBody>
+          <a:bodyPr wrap="square" lIns="45720" tIns="22860" rIns="45720" bIns="22860" rtlCol="0" anchor="ctr"/>
+          <a:lstStyle/>
+          <a:p>
+            <a:pPr algn="ctr" indent="0" marL="0">
+              <a:lnSpc>
+                <a:spcPct val="95000"/>
+              </a:lnSpc>
+              <a:buNone/>
+            </a:pPr>
+            <a:r>
+              <a:rPr lang="pt-BR" sz="1250" b="1" dirty="0">
+                <a:solidFill>
+                  <a:srgbClr val="241C3B"/>
+                </a:solidFill>
+                <a:latin typeface="Calibri" pitchFamily="34" charset="0"/>
+                <a:ea typeface="Calibri"/>
+                <a:cs typeface="Calibri"/>
+              </a:rPr>
+              <a:t>Top-N</a:t>
+            </a:r>
+          </a:p>
+          <a:p>
+            <a:pPr algn="ctr" indent="0" marL="0">
+              <a:lnSpc>
+                <a:spcPct val="95000"/>
+              </a:lnSpc>
+              <a:buNone/>
+            </a:pPr>
+            <a:r>
+              <a:rPr lang="pt-BR" sz="1250" b="1" dirty="0">
+                <a:solidFill>
+                  <a:srgbClr val="241C3B"/>
+                </a:solidFill>
+                <a:latin typeface="Calibri" pitchFamily="34" charset="0"/>
+                <a:ea typeface="Calibri"/>
+                <a:cs typeface="Calibri"/>
+              </a:rPr>
+              <a:t>recomendações</a:t>
             </a:r>
           </a:p>
         </p:txBody>
@@ -3259,7 +2869,7 @@
                 <a:ea typeface="Consolas"/>
                 <a:cs typeface="Consolas"/>
               </a:rPr>
-              <a:t>09 — INSIGHTS &amp; CONCLUSÃO</a:t>
+              <a:t>08 — RESULTADOS</a:t>
             </a:r>
           </a:p>
         </p:txBody>
@@ -3297,7 +2907,7 @@
                 <a:ea typeface="Calibri"/>
                 <a:cs typeface="Calibri"/>
               </a:rPr>
-              <a:t>Como o sistema apoia a decisão</a:t>
+              <a:t>O que os números mostram</a:t>
             </a:r>
           </a:p>
         </p:txBody>
@@ -3311,7 +2921,7 @@
         <p:spPr>
           <a:xfrm>
             <a:off x="502920" y="1360000"/>
-            <a:ext cx="2600000" cy="1740000"/>
+            <a:ext cx="3450000" cy="880000"/>
           </a:xfrm>
           <a:prstGeom prst="roundRect">
             <a:avLst>
@@ -3333,20 +2943,85 @@
       </p:sp>
       <p:sp>
         <p:nvSpPr>
-          <p:cNvPr id="7" name="E7"/>
-          <p:cNvSpPr/>
-          <p:nvPr/>
-        </p:nvSpPr>
-        <p:spPr>
-          <a:xfrm>
-            <a:off x="708660" y="1565740"/>
-            <a:ext cx="140000" cy="140000"/>
-          </a:xfrm>
-          <a:prstGeom prst="ellipse">
-            <a:avLst/>
-          </a:prstGeom>
-          <a:solidFill>
-            <a:srgbClr val="DB2777"/>
+          <p:cNvPr id="7" name="T7"/>
+          <p:cNvSpPr/>
+          <p:nvPr/>
+        </p:nvSpPr>
+        <p:spPr>
+          <a:xfrm>
+            <a:off x="502920" y="1360000"/>
+            <a:ext cx="3450000" cy="880000"/>
+          </a:xfrm>
+          <a:prstGeom prst="rect">
+            <a:avLst/>
+          </a:prstGeom>
+          <a:noFill/>
+          <a:ln/>
+        </p:spPr>
+        <p:txBody>
+          <a:bodyPr wrap="square" lIns="228600" tIns="68580" rIns="228600" bIns="68580" rtlCol="0" anchor="ctr"/>
+          <a:lstStyle/>
+          <a:p>
+            <a:pPr algn="l" indent="0" marL="0">
+              <a:lnSpc>
+                <a:spcPct val="95000"/>
+              </a:lnSpc>
+              <a:buNone/>
+            </a:pPr>
+            <a:r>
+              <a:rPr lang="pt-BR" sz="2000" b="1" dirty="0">
+                <a:solidFill>
+                  <a:srgbClr val="7C3AED"/>
+                </a:solidFill>
+                <a:latin typeface="Calibri" pitchFamily="34" charset="0"/>
+                <a:ea typeface="Calibri"/>
+                <a:cs typeface="Calibri"/>
+              </a:rPr>
+              <a:t>ILS ≈ 0,90</a:t>
+            </a:r>
+          </a:p>
+          <a:p>
+            <a:pPr algn="l" indent="0" marL="0">
+              <a:lnSpc>
+                <a:spcPct val="100000"/>
+              </a:lnSpc>
+              <a:spcBef>
+                <a:spcPts val="300"/>
+              </a:spcBef>
+              <a:buNone/>
+            </a:pPr>
+            <a:r>
+              <a:rPr lang="pt-BR" sz="1050" b="1" dirty="0">
+                <a:solidFill>
+                  <a:srgbClr val="241C3B"/>
+                </a:solidFill>
+                <a:latin typeface="Calibri" pitchFamily="34" charset="0"/>
+                <a:ea typeface="Calibri"/>
+                <a:cs typeface="Calibri"/>
+              </a:rPr>
+              <a:t>diversidade intra-lista: listas coesas</a:t>
+            </a:r>
+          </a:p>
+        </p:txBody>
+      </p:sp>
+      <p:sp>
+        <p:nvSpPr>
+          <p:cNvPr id="8" name="R8"/>
+          <p:cNvSpPr/>
+          <p:nvPr/>
+        </p:nvSpPr>
+        <p:spPr>
+          <a:xfrm>
+            <a:off x="502920" y="2350000"/>
+            <a:ext cx="3450000" cy="880000"/>
+          </a:xfrm>
+          <a:prstGeom prst="roundRect">
+            <a:avLst>
+              <a:gd name="adj" fmla="val 10526"/>
+            </a:avLst>
+          </a:prstGeom>
+          <a:solidFill>
+            <a:srgbClr val="F1ECFB"/>
           </a:solidFill>
           <a:ln/>
           <a:effectLst>
@@ -3360,14 +3035,14 @@
       </p:sp>
       <p:sp>
         <p:nvSpPr>
-          <p:cNvPr id="8" name="T8"/>
-          <p:cNvSpPr/>
-          <p:nvPr/>
-        </p:nvSpPr>
-        <p:spPr>
-          <a:xfrm>
-            <a:off x="502920" y="1790000"/>
-            <a:ext cx="2600000" cy="360000"/>
+          <p:cNvPr id="9" name="T9"/>
+          <p:cNvSpPr/>
+          <p:nvPr/>
+        </p:nvSpPr>
+        <p:spPr>
+          <a:xfrm>
+            <a:off x="502920" y="2350000"/>
+            <a:ext cx="3450000" cy="880000"/>
           </a:xfrm>
           <a:prstGeom prst="rect">
             <a:avLst/>
@@ -3376,55 +3051,39 @@
           <a:ln/>
         </p:spPr>
         <p:txBody>
-          <a:bodyPr wrap="square" lIns="205740" tIns="0" rIns="205740" bIns="0" rtlCol="0" anchor="ctr"/>
-          <a:lstStyle/>
-          <a:p>
-            <a:pPr algn="l" indent="0" marL="0">
-              <a:buNone/>
-            </a:pPr>
-            <a:r>
-              <a:rPr lang="pt-BR" sz="1400" b="1" dirty="0">
-                <a:solidFill>
-                  <a:srgbClr val="7C3AED"/>
-                </a:solidFill>
-                <a:latin typeface="Calibri" pitchFamily="34" charset="0"/>
-                <a:ea typeface="Calibri"/>
-                <a:cs typeface="Calibri"/>
-              </a:rPr>
-              <a:t>Conteúdo funciona</a:t>
-            </a:r>
-          </a:p>
-        </p:txBody>
-      </p:sp>
-      <p:sp>
-        <p:nvSpPr>
-          <p:cNvPr id="9" name="T9"/>
-          <p:cNvSpPr/>
-          <p:nvPr/>
-        </p:nvSpPr>
-        <p:spPr>
-          <a:xfrm>
-            <a:off x="502920" y="2140000"/>
-            <a:ext cx="2600000" cy="920000"/>
-          </a:xfrm>
-          <a:prstGeom prst="rect">
-            <a:avLst/>
-          </a:prstGeom>
-          <a:noFill/>
-          <a:ln/>
-        </p:spPr>
-        <p:txBody>
-          <a:bodyPr wrap="square" lIns="205740" tIns="0" rIns="205740" bIns="0" rtlCol="0" anchor="ctr"/>
+          <a:bodyPr wrap="square" lIns="228600" tIns="68580" rIns="228600" bIns="68580" rtlCol="0" anchor="ctr"/>
           <a:lstStyle/>
           <a:p>
             <a:pPr algn="l" indent="0" marL="0">
               <a:lnSpc>
-                <a:spcPct val="108000"/>
+                <a:spcPct val="95000"/>
               </a:lnSpc>
               <a:buNone/>
             </a:pPr>
             <a:r>
-              <a:rPr lang="pt-BR" sz="1100" dirty="0">
+              <a:rPr lang="pt-BR" sz="1700" b="1" dirty="0">
+                <a:solidFill>
+                  <a:srgbClr val="7C3AED"/>
+                </a:solidFill>
+                <a:latin typeface="Calibri" pitchFamily="34" charset="0"/>
+                <a:ea typeface="Calibri"/>
+                <a:cs typeface="Calibri"/>
+              </a:rPr>
+              <a:t>Cosseno ≈ K-Means</a:t>
+            </a:r>
+          </a:p>
+          <a:p>
+            <a:pPr algn="l" indent="0" marL="0">
+              <a:lnSpc>
+                <a:spcPct val="100000"/>
+              </a:lnSpc>
+              <a:spcBef>
+                <a:spcPts val="300"/>
+              </a:spcBef>
+              <a:buNone/>
+            </a:pPr>
+            <a:r>
+              <a:rPr lang="pt-BR" sz="1050" b="1" dirty="0">
                 <a:solidFill>
                   <a:srgbClr val="241C3B"/>
                 </a:solidFill>
@@ -3432,7 +3091,7 @@
                 <a:ea typeface="Calibri"/>
                 <a:cs typeface="Calibri"/>
               </a:rPr>
-              <a:t>Similaridade &gt; 0,90: recupera faixas acusticamente próximas ao gosto e apoia a decisão “o que ouvir a seguir”.</a:t>
+              <a:t>desempenho praticamente equivalente</a:t>
             </a:r>
           </a:p>
         </p:txBody>
@@ -3445,8 +3104,8 @@
         </p:nvSpPr>
         <p:spPr>
           <a:xfrm>
-            <a:off x="3272000" y="1360000"/>
-            <a:ext cx="2600000" cy="1740000"/>
+            <a:off x="502920" y="3340000"/>
+            <a:ext cx="3450000" cy="880000"/>
           </a:xfrm>
           <a:prstGeom prst="roundRect">
             <a:avLst>
@@ -3468,22 +3127,92 @@
       </p:sp>
       <p:sp>
         <p:nvSpPr>
-          <p:cNvPr id="11" name="E11"/>
-          <p:cNvSpPr/>
-          <p:nvPr/>
-        </p:nvSpPr>
-        <p:spPr>
-          <a:xfrm>
-            <a:off x="3477740" y="1565740"/>
-            <a:ext cx="140000" cy="140000"/>
-          </a:xfrm>
-          <a:prstGeom prst="ellipse">
-            <a:avLst/>
-          </a:prstGeom>
-          <a:solidFill>
-            <a:srgbClr val="DB2777"/>
-          </a:solidFill>
-          <a:ln/>
+          <p:cNvPr id="11" name="T11"/>
+          <p:cNvSpPr/>
+          <p:nvPr/>
+        </p:nvSpPr>
+        <p:spPr>
+          <a:xfrm>
+            <a:off x="502920" y="3340000"/>
+            <a:ext cx="3450000" cy="880000"/>
+          </a:xfrm>
+          <a:prstGeom prst="rect">
+            <a:avLst/>
+          </a:prstGeom>
+          <a:noFill/>
+          <a:ln/>
+        </p:spPr>
+        <p:txBody>
+          <a:bodyPr wrap="square" lIns="228600" tIns="68580" rIns="228600" bIns="68580" rtlCol="0" anchor="ctr"/>
+          <a:lstStyle/>
+          <a:p>
+            <a:pPr algn="l" indent="0" marL="0">
+              <a:lnSpc>
+                <a:spcPct val="95000"/>
+              </a:lnSpc>
+              <a:buNone/>
+            </a:pPr>
+            <a:r>
+              <a:rPr lang="pt-BR" sz="1900" b="1" dirty="0">
+                <a:solidFill>
+                  <a:srgbClr val="7C3AED"/>
+                </a:solidFill>
+                <a:latin typeface="Calibri" pitchFamily="34" charset="0"/>
+                <a:ea typeface="Calibri"/>
+                <a:cs typeface="Calibri"/>
+              </a:rPr>
+              <a:t>ótimo em K = 8</a:t>
+            </a:r>
+          </a:p>
+          <a:p>
+            <a:pPr algn="l" indent="0" marL="0">
+              <a:lnSpc>
+                <a:spcPct val="100000"/>
+              </a:lnSpc>
+              <a:spcBef>
+                <a:spcPts val="300"/>
+              </a:spcBef>
+              <a:buNone/>
+            </a:pPr>
+            <a:r>
+              <a:rPr lang="pt-BR" sz="1050" b="1" dirty="0">
+                <a:solidFill>
+                  <a:srgbClr val="241C3B"/>
+                </a:solidFill>
+                <a:latin typeface="Calibri" pitchFamily="34" charset="0"/>
+                <a:ea typeface="Calibri"/>
+                <a:cs typeface="Calibri"/>
+              </a:rPr>
+              <a:t>silhueta 0,147 — estrutura fraca, porém real</a:t>
+            </a:r>
+          </a:p>
+        </p:txBody>
+      </p:sp>
+      <p:sp>
+        <p:nvSpPr>
+          <p:cNvPr id="12" name="R12"/>
+          <p:cNvSpPr/>
+          <p:nvPr/>
+        </p:nvSpPr>
+        <p:spPr>
+          <a:xfrm>
+            <a:off x="4260000" y="1360000"/>
+            <a:ext cx="4381080" cy="2860000"/>
+          </a:xfrm>
+          <a:prstGeom prst="roundRect">
+            <a:avLst>
+              <a:gd name="adj" fmla="val 10526"/>
+            </a:avLst>
+          </a:prstGeom>
+          <a:solidFill>
+            <a:srgbClr val="FFFFFF"/>
+          </a:solidFill>
+          <a:ln w="12700">
+            <a:solidFill>
+              <a:srgbClr val="F1ECFB"/>
+            </a:solidFill>
+            <a:prstDash val="solid"/>
+          </a:ln>
           <a:effectLst>
             <a:outerShdw sx="100000" sy="100000" kx="0" ky="0" algn="bl" rotWithShape="0" blurRad="101600" dist="25400" dir="5400000">
               <a:srgbClr val="6B6392">
@@ -3495,14 +3224,14 @@
       </p:sp>
       <p:sp>
         <p:nvSpPr>
-          <p:cNvPr id="12" name="T12"/>
-          <p:cNvSpPr/>
-          <p:nvPr/>
-        </p:nvSpPr>
-        <p:spPr>
-          <a:xfrm>
-            <a:off x="3272000" y="1790000"/>
-            <a:ext cx="2600000" cy="360000"/>
+          <p:cNvPr id="13" name="T13"/>
+          <p:cNvSpPr/>
+          <p:nvPr/>
+        </p:nvSpPr>
+        <p:spPr>
+          <a:xfrm>
+            <a:off x="4488600" y="1520000"/>
+            <a:ext cx="3923880" cy="300000"/>
           </a:xfrm>
           <a:prstGeom prst="rect">
             <a:avLst/>
@@ -3511,14 +3240,14 @@
           <a:ln/>
         </p:spPr>
         <p:txBody>
-          <a:bodyPr wrap="square" lIns="205740" tIns="0" rIns="205740" bIns="0" rtlCol="0" anchor="ctr"/>
+          <a:bodyPr wrap="square" lIns="0" tIns="0" rIns="0" bIns="0" rtlCol="0" anchor="ctr"/>
           <a:lstStyle/>
           <a:p>
             <a:pPr algn="l" indent="0" marL="0">
               <a:buNone/>
             </a:pPr>
             <a:r>
-              <a:rPr lang="pt-BR" sz="1400" b="1" dirty="0">
+              <a:rPr lang="pt-BR" sz="1350" b="1" dirty="0">
                 <a:solidFill>
                   <a:srgbClr val="7C3AED"/>
                 </a:solidFill>
@@ -3526,21 +3255,21 @@
                 <a:ea typeface="Calibri"/>
                 <a:cs typeface="Calibri"/>
               </a:rPr>
-              <a:t>Áudio não rotula gênero</a:t>
-            </a:r>
-          </a:p>
-        </p:txBody>
-      </p:sp>
-      <p:sp>
-        <p:nvSpPr>
-          <p:cNvPr id="13" name="T13"/>
-          <p:cNvSpPr/>
-          <p:nvPr/>
-        </p:nvSpPr>
-        <p:spPr>
-          <a:xfrm>
-            <a:off x="3272000" y="2140000"/>
-            <a:ext cx="2600000" cy="920000"/>
+              <a:t>Precisão de Gênero@10</a:t>
+            </a:r>
+          </a:p>
+        </p:txBody>
+      </p:sp>
+      <p:sp>
+        <p:nvSpPr>
+          <p:cNvPr id="14" name="T14"/>
+          <p:cNvSpPr/>
+          <p:nvPr/>
+        </p:nvSpPr>
+        <p:spPr>
+          <a:xfrm>
+            <a:off x="4488600" y="1830000"/>
+            <a:ext cx="3923880" cy="240000"/>
           </a:xfrm>
           <a:prstGeom prst="rect">
             <a:avLst/>
@@ -3549,17 +3278,743 @@
           <a:ln/>
         </p:spPr>
         <p:txBody>
-          <a:bodyPr wrap="square" lIns="205740" tIns="0" rIns="205740" bIns="0" rtlCol="0" anchor="ctr"/>
+          <a:bodyPr wrap="square" lIns="0" tIns="0" rIns="0" bIns="0" rtlCol="0" anchor="ctr"/>
+          <a:lstStyle/>
+          <a:p>
+            <a:pPr algn="l" indent="0" marL="0">
+              <a:buNone/>
+            </a:pPr>
+            <a:r>
+              <a:rPr lang="pt-BR" sz="1000" i="1" dirty="0">
+                <a:solidFill>
+                  <a:srgbClr val="6B6392"/>
+                </a:solidFill>
+                <a:latin typeface="Calibri" pitchFamily="34" charset="0"/>
+                <a:ea typeface="Calibri"/>
+                <a:cs typeface="Calibri"/>
+              </a:rPr>
+              <a:t>linha de base (acaso) = 0,88%</a:t>
+            </a:r>
+          </a:p>
+        </p:txBody>
+      </p:sp>
+      <p:sp>
+        <p:nvSpPr>
+          <p:cNvPr id="15" name="T15"/>
+          <p:cNvSpPr/>
+          <p:nvPr/>
+        </p:nvSpPr>
+        <p:spPr>
+          <a:xfrm>
+            <a:off x="4488600" y="2180000"/>
+            <a:ext cx="880000" cy="300000"/>
+          </a:xfrm>
+          <a:prstGeom prst="rect">
+            <a:avLst/>
+          </a:prstGeom>
+          <a:noFill/>
+          <a:ln/>
+        </p:spPr>
+        <p:txBody>
+          <a:bodyPr wrap="square" lIns="0" tIns="0" rIns="0" bIns="0" rtlCol="0" anchor="ctr"/>
+          <a:lstStyle/>
+          <a:p>
+            <a:pPr algn="l" indent="0" marL="0">
+              <a:buNone/>
+            </a:pPr>
+            <a:r>
+              <a:rPr lang="pt-BR" sz="1100" b="1" dirty="0">
+                <a:solidFill>
+                  <a:srgbClr val="241C3B"/>
+                </a:solidFill>
+                <a:latin typeface="Calibri" pitchFamily="34" charset="0"/>
+                <a:ea typeface="Calibri"/>
+                <a:cs typeface="Calibri"/>
+              </a:rPr>
+              <a:t>Clássica</a:t>
+            </a:r>
+          </a:p>
+        </p:txBody>
+      </p:sp>
+      <p:sp>
+        <p:nvSpPr>
+          <p:cNvPr id="16" name="R16"/>
+          <p:cNvSpPr/>
+          <p:nvPr/>
+        </p:nvSpPr>
+        <p:spPr>
+          <a:xfrm>
+            <a:off x="5368600" y="2238000"/>
+            <a:ext cx="1740000" cy="184000"/>
+          </a:xfrm>
+          <a:prstGeom prst="roundRect">
+            <a:avLst>
+              <a:gd name="adj" fmla="val 50000"/>
+            </a:avLst>
+          </a:prstGeom>
+          <a:solidFill>
+            <a:srgbClr val="EDE7FB"/>
+          </a:solidFill>
+          <a:ln/>
+        </p:spPr>
+      </p:sp>
+      <p:sp>
+        <p:nvSpPr>
+          <p:cNvPr id="17" name="R17"/>
+          <p:cNvSpPr/>
+          <p:nvPr/>
+        </p:nvSpPr>
+        <p:spPr>
+          <a:xfrm>
+            <a:off x="5368600" y="2238000"/>
+            <a:ext cx="1740000" cy="184000"/>
+          </a:xfrm>
+          <a:prstGeom prst="roundRect">
+            <a:avLst>
+              <a:gd name="adj" fmla="val 50000"/>
+            </a:avLst>
+          </a:prstGeom>
+          <a:solidFill>
+            <a:srgbClr val="7C3AED"/>
+          </a:solidFill>
+          <a:ln/>
+        </p:spPr>
+      </p:sp>
+      <p:sp>
+        <p:nvSpPr>
+          <p:cNvPr id="18" name="T18"/>
+          <p:cNvSpPr/>
+          <p:nvPr/>
+        </p:nvSpPr>
+        <p:spPr>
+          <a:xfrm>
+            <a:off x="7178600" y="2180000"/>
+            <a:ext cx="1322480" cy="300000"/>
+          </a:xfrm>
+          <a:prstGeom prst="rect">
+            <a:avLst/>
+          </a:prstGeom>
+          <a:noFill/>
+          <a:ln/>
+        </p:spPr>
+        <p:txBody>
+          <a:bodyPr wrap="square" lIns="0" tIns="0" rIns="0" bIns="0" rtlCol="0" anchor="ctr"/>
+          <a:lstStyle/>
+          <a:p>
+            <a:pPr algn="l" indent="0" marL="0">
+              <a:buNone/>
+            </a:pPr>
+            <a:r>
+              <a:rPr lang="pt-BR" sz="1100" b="1" dirty="0">
+                <a:solidFill>
+                  <a:srgbClr val="241C3B"/>
+                </a:solidFill>
+                <a:latin typeface="Calibri" pitchFamily="34" charset="0"/>
+                <a:ea typeface="Calibri"/>
+                <a:cs typeface="Calibri"/>
+              </a:rPr>
+              <a:t>25,0%  </a:t>
+            </a:r>
+            <a:r>
+              <a:rPr lang="pt-BR" sz="900" dirty="0">
+                <a:solidFill>
+                  <a:srgbClr val="6B6392"/>
+                </a:solidFill>
+                <a:latin typeface="Calibri" pitchFamily="34" charset="0"/>
+                <a:ea typeface="Calibri"/>
+                <a:cs typeface="Calibri"/>
+              </a:rPr>
+              <a:t>28×</a:t>
+            </a:r>
+          </a:p>
+        </p:txBody>
+      </p:sp>
+      <p:sp>
+        <p:nvSpPr>
+          <p:cNvPr id="19" name="T19"/>
+          <p:cNvSpPr/>
+          <p:nvPr/>
+        </p:nvSpPr>
+        <p:spPr>
+          <a:xfrm>
+            <a:off x="4488600" y="2580000"/>
+            <a:ext cx="880000" cy="300000"/>
+          </a:xfrm>
+          <a:prstGeom prst="rect">
+            <a:avLst/>
+          </a:prstGeom>
+          <a:noFill/>
+          <a:ln/>
+        </p:spPr>
+        <p:txBody>
+          <a:bodyPr wrap="square" lIns="0" tIns="0" rIns="0" bIns="0" rtlCol="0" anchor="ctr"/>
+          <a:lstStyle/>
+          <a:p>
+            <a:pPr algn="l" indent="0" marL="0">
+              <a:buNone/>
+            </a:pPr>
+            <a:r>
+              <a:rPr lang="pt-BR" sz="1100" b="1" dirty="0">
+                <a:solidFill>
+                  <a:srgbClr val="241C3B"/>
+                </a:solidFill>
+                <a:latin typeface="Calibri" pitchFamily="34" charset="0"/>
+                <a:ea typeface="Calibri"/>
+                <a:cs typeface="Calibri"/>
+              </a:rPr>
+              <a:t>Rock</a:t>
+            </a:r>
+          </a:p>
+        </p:txBody>
+      </p:sp>
+      <p:sp>
+        <p:nvSpPr>
+          <p:cNvPr id="20" name="R20"/>
+          <p:cNvSpPr/>
+          <p:nvPr/>
+        </p:nvSpPr>
+        <p:spPr>
+          <a:xfrm>
+            <a:off x="5368600" y="2638000"/>
+            <a:ext cx="1740000" cy="184000"/>
+          </a:xfrm>
+          <a:prstGeom prst="roundRect">
+            <a:avLst>
+              <a:gd name="adj" fmla="val 50000"/>
+            </a:avLst>
+          </a:prstGeom>
+          <a:solidFill>
+            <a:srgbClr val="EDE7FB"/>
+          </a:solidFill>
+          <a:ln/>
+        </p:spPr>
+      </p:sp>
+      <p:sp>
+        <p:nvSpPr>
+          <p:cNvPr id="21" name="R21"/>
+          <p:cNvSpPr/>
+          <p:nvPr/>
+        </p:nvSpPr>
+        <p:spPr>
+          <a:xfrm>
+            <a:off x="5368600" y="2638000"/>
+            <a:ext cx="626400" cy="184000"/>
+          </a:xfrm>
+          <a:prstGeom prst="roundRect">
+            <a:avLst>
+              <a:gd name="adj" fmla="val 50000"/>
+            </a:avLst>
+          </a:prstGeom>
+          <a:solidFill>
+            <a:srgbClr val="7C3AED"/>
+          </a:solidFill>
+          <a:ln/>
+        </p:spPr>
+      </p:sp>
+      <p:sp>
+        <p:nvSpPr>
+          <p:cNvPr id="22" name="T22"/>
+          <p:cNvSpPr/>
+          <p:nvPr/>
+        </p:nvSpPr>
+        <p:spPr>
+          <a:xfrm>
+            <a:off x="7178600" y="2580000"/>
+            <a:ext cx="1322480" cy="300000"/>
+          </a:xfrm>
+          <a:prstGeom prst="rect">
+            <a:avLst/>
+          </a:prstGeom>
+          <a:noFill/>
+          <a:ln/>
+        </p:spPr>
+        <p:txBody>
+          <a:bodyPr wrap="square" lIns="0" tIns="0" rIns="0" bIns="0" rtlCol="0" anchor="ctr"/>
+          <a:lstStyle/>
+          <a:p>
+            <a:pPr algn="l" indent="0" marL="0">
+              <a:buNone/>
+            </a:pPr>
+            <a:r>
+              <a:rPr lang="pt-BR" sz="1100" b="1" dirty="0">
+                <a:solidFill>
+                  <a:srgbClr val="241C3B"/>
+                </a:solidFill>
+                <a:latin typeface="Calibri" pitchFamily="34" charset="0"/>
+                <a:ea typeface="Calibri"/>
+                <a:cs typeface="Calibri"/>
+              </a:rPr>
+              <a:t>9,0%  </a:t>
+            </a:r>
+            <a:r>
+              <a:rPr lang="pt-BR" sz="900" dirty="0">
+                <a:solidFill>
+                  <a:srgbClr val="6B6392"/>
+                </a:solidFill>
+                <a:latin typeface="Calibri" pitchFamily="34" charset="0"/>
+                <a:ea typeface="Calibri"/>
+                <a:cs typeface="Calibri"/>
+              </a:rPr>
+              <a:t>10×</a:t>
+            </a:r>
+          </a:p>
+        </p:txBody>
+      </p:sp>
+      <p:sp>
+        <p:nvSpPr>
+          <p:cNvPr id="23" name="T23"/>
+          <p:cNvSpPr/>
+          <p:nvPr/>
+        </p:nvSpPr>
+        <p:spPr>
+          <a:xfrm>
+            <a:off x="4488600" y="2980000"/>
+            <a:ext cx="880000" cy="300000"/>
+          </a:xfrm>
+          <a:prstGeom prst="rect">
+            <a:avLst/>
+          </a:prstGeom>
+          <a:noFill/>
+          <a:ln/>
+        </p:spPr>
+        <p:txBody>
+          <a:bodyPr wrap="square" lIns="0" tIns="0" rIns="0" bIns="0" rtlCol="0" anchor="ctr"/>
+          <a:lstStyle/>
+          <a:p>
+            <a:pPr algn="l" indent="0" marL="0">
+              <a:buNone/>
+            </a:pPr>
+            <a:r>
+              <a:rPr lang="pt-BR" sz="1100" b="1" dirty="0">
+                <a:solidFill>
+                  <a:srgbClr val="241C3B"/>
+                </a:solidFill>
+                <a:latin typeface="Calibri" pitchFamily="34" charset="0"/>
+                <a:ea typeface="Calibri"/>
+                <a:cs typeface="Calibri"/>
+              </a:rPr>
+              <a:t>Pop</a:t>
+            </a:r>
+          </a:p>
+        </p:txBody>
+      </p:sp>
+      <p:sp>
+        <p:nvSpPr>
+          <p:cNvPr id="24" name="R24"/>
+          <p:cNvSpPr/>
+          <p:nvPr/>
+        </p:nvSpPr>
+        <p:spPr>
+          <a:xfrm>
+            <a:off x="5368600" y="3038000"/>
+            <a:ext cx="1740000" cy="184000"/>
+          </a:xfrm>
+          <a:prstGeom prst="roundRect">
+            <a:avLst>
+              <a:gd name="adj" fmla="val 50000"/>
+            </a:avLst>
+          </a:prstGeom>
+          <a:solidFill>
+            <a:srgbClr val="EDE7FB"/>
+          </a:solidFill>
+          <a:ln/>
+        </p:spPr>
+      </p:sp>
+      <p:sp>
+        <p:nvSpPr>
+          <p:cNvPr id="25" name="R25"/>
+          <p:cNvSpPr/>
+          <p:nvPr/>
+        </p:nvSpPr>
+        <p:spPr>
+          <a:xfrm>
+            <a:off x="5368600" y="3038000"/>
+            <a:ext cx="382800" cy="184000"/>
+          </a:xfrm>
+          <a:prstGeom prst="roundRect">
+            <a:avLst>
+              <a:gd name="adj" fmla="val 50000"/>
+            </a:avLst>
+          </a:prstGeom>
+          <a:solidFill>
+            <a:srgbClr val="7C3AED"/>
+          </a:solidFill>
+          <a:ln/>
+        </p:spPr>
+      </p:sp>
+      <p:sp>
+        <p:nvSpPr>
+          <p:cNvPr id="26" name="T26"/>
+          <p:cNvSpPr/>
+          <p:nvPr/>
+        </p:nvSpPr>
+        <p:spPr>
+          <a:xfrm>
+            <a:off x="7178600" y="2980000"/>
+            <a:ext cx="1322480" cy="300000"/>
+          </a:xfrm>
+          <a:prstGeom prst="rect">
+            <a:avLst/>
+          </a:prstGeom>
+          <a:noFill/>
+          <a:ln/>
+        </p:spPr>
+        <p:txBody>
+          <a:bodyPr wrap="square" lIns="0" tIns="0" rIns="0" bIns="0" rtlCol="0" anchor="ctr"/>
+          <a:lstStyle/>
+          <a:p>
+            <a:pPr algn="l" indent="0" marL="0">
+              <a:buNone/>
+            </a:pPr>
+            <a:r>
+              <a:rPr lang="pt-BR" sz="1100" b="1" dirty="0">
+                <a:solidFill>
+                  <a:srgbClr val="241C3B"/>
+                </a:solidFill>
+                <a:latin typeface="Calibri" pitchFamily="34" charset="0"/>
+                <a:ea typeface="Calibri"/>
+                <a:cs typeface="Calibri"/>
+              </a:rPr>
+              <a:t>5,5%  </a:t>
+            </a:r>
+            <a:r>
+              <a:rPr lang="pt-BR" sz="900" dirty="0">
+                <a:solidFill>
+                  <a:srgbClr val="6B6392"/>
+                </a:solidFill>
+                <a:latin typeface="Calibri" pitchFamily="34" charset="0"/>
+                <a:ea typeface="Calibri"/>
+                <a:cs typeface="Calibri"/>
+              </a:rPr>
+              <a:t>6×</a:t>
+            </a:r>
+          </a:p>
+        </p:txBody>
+      </p:sp>
+      <p:sp>
+        <p:nvSpPr>
+          <p:cNvPr id="27" name="T27"/>
+          <p:cNvSpPr/>
+          <p:nvPr/>
+        </p:nvSpPr>
+        <p:spPr>
+          <a:xfrm>
+            <a:off x="4488600" y="3380000"/>
+            <a:ext cx="880000" cy="300000"/>
+          </a:xfrm>
+          <a:prstGeom prst="rect">
+            <a:avLst/>
+          </a:prstGeom>
+          <a:noFill/>
+          <a:ln/>
+        </p:spPr>
+        <p:txBody>
+          <a:bodyPr wrap="square" lIns="0" tIns="0" rIns="0" bIns="0" rtlCol="0" anchor="ctr"/>
+          <a:lstStyle/>
+          <a:p>
+            <a:pPr algn="l" indent="0" marL="0">
+              <a:buNone/>
+            </a:pPr>
+            <a:r>
+              <a:rPr lang="pt-BR" sz="1100" b="1" dirty="0">
+                <a:solidFill>
+                  <a:srgbClr val="241C3B"/>
+                </a:solidFill>
+                <a:latin typeface="Calibri" pitchFamily="34" charset="0"/>
+                <a:ea typeface="Calibri"/>
+                <a:cs typeface="Calibri"/>
+              </a:rPr>
+              <a:t>Metal</a:t>
+            </a:r>
+          </a:p>
+        </p:txBody>
+      </p:sp>
+      <p:sp>
+        <p:nvSpPr>
+          <p:cNvPr id="28" name="R28"/>
+          <p:cNvSpPr/>
+          <p:nvPr/>
+        </p:nvSpPr>
+        <p:spPr>
+          <a:xfrm>
+            <a:off x="5368600" y="3438000"/>
+            <a:ext cx="1740000" cy="184000"/>
+          </a:xfrm>
+          <a:prstGeom prst="roundRect">
+            <a:avLst>
+              <a:gd name="adj" fmla="val 50000"/>
+            </a:avLst>
+          </a:prstGeom>
+          <a:solidFill>
+            <a:srgbClr val="EDE7FB"/>
+          </a:solidFill>
+          <a:ln/>
+        </p:spPr>
+      </p:sp>
+      <p:sp>
+        <p:nvSpPr>
+          <p:cNvPr id="29" name="R29"/>
+          <p:cNvSpPr/>
+          <p:nvPr/>
+        </p:nvSpPr>
+        <p:spPr>
+          <a:xfrm>
+            <a:off x="5368600" y="3438000"/>
+            <a:ext cx="104400" cy="184000"/>
+          </a:xfrm>
+          <a:prstGeom prst="roundRect">
+            <a:avLst>
+              <a:gd name="adj" fmla="val 50000"/>
+            </a:avLst>
+          </a:prstGeom>
+          <a:solidFill>
+            <a:srgbClr val="7C3AED"/>
+          </a:solidFill>
+          <a:ln/>
+        </p:spPr>
+      </p:sp>
+      <p:sp>
+        <p:nvSpPr>
+          <p:cNvPr id="30" name="T30"/>
+          <p:cNvSpPr/>
+          <p:nvPr/>
+        </p:nvSpPr>
+        <p:spPr>
+          <a:xfrm>
+            <a:off x="7178600" y="3380000"/>
+            <a:ext cx="1322480" cy="300000"/>
+          </a:xfrm>
+          <a:prstGeom prst="rect">
+            <a:avLst/>
+          </a:prstGeom>
+          <a:noFill/>
+          <a:ln/>
+        </p:spPr>
+        <p:txBody>
+          <a:bodyPr wrap="square" lIns="0" tIns="0" rIns="0" bIns="0" rtlCol="0" anchor="ctr"/>
+          <a:lstStyle/>
+          <a:p>
+            <a:pPr algn="l" indent="0" marL="0">
+              <a:buNone/>
+            </a:pPr>
+            <a:r>
+              <a:rPr lang="pt-BR" sz="1100" b="1" dirty="0">
+                <a:solidFill>
+                  <a:srgbClr val="241C3B"/>
+                </a:solidFill>
+                <a:latin typeface="Calibri" pitchFamily="34" charset="0"/>
+                <a:ea typeface="Calibri"/>
+                <a:cs typeface="Calibri"/>
+              </a:rPr>
+              <a:t>1,5%  </a:t>
+            </a:r>
+            <a:r>
+              <a:rPr lang="pt-BR" sz="900" dirty="0">
+                <a:solidFill>
+                  <a:srgbClr val="6B6392"/>
+                </a:solidFill>
+                <a:latin typeface="Calibri" pitchFamily="34" charset="0"/>
+                <a:ea typeface="Calibri"/>
+                <a:cs typeface="Calibri"/>
+              </a:rPr>
+              <a:t>1,7×</a:t>
+            </a:r>
+          </a:p>
+        </p:txBody>
+      </p:sp>
+      <p:sp>
+        <p:nvSpPr>
+          <p:cNvPr id="31" name="T31"/>
+          <p:cNvSpPr/>
+          <p:nvPr/>
+        </p:nvSpPr>
+        <p:spPr>
+          <a:xfrm>
+            <a:off x="4488600" y="3780000"/>
+            <a:ext cx="880000" cy="300000"/>
+          </a:xfrm>
+          <a:prstGeom prst="rect">
+            <a:avLst/>
+          </a:prstGeom>
+          <a:noFill/>
+          <a:ln/>
+        </p:spPr>
+        <p:txBody>
+          <a:bodyPr wrap="square" lIns="0" tIns="0" rIns="0" bIns="0" rtlCol="0" anchor="ctr"/>
+          <a:lstStyle/>
+          <a:p>
+            <a:pPr algn="l" indent="0" marL="0">
+              <a:buNone/>
+            </a:pPr>
+            <a:r>
+              <a:rPr lang="pt-BR" sz="1100" b="1" dirty="0">
+                <a:solidFill>
+                  <a:srgbClr val="241C3B"/>
+                </a:solidFill>
+                <a:latin typeface="Calibri" pitchFamily="34" charset="0"/>
+                <a:ea typeface="Calibri"/>
+                <a:cs typeface="Calibri"/>
+              </a:rPr>
+              <a:t>Jazz</a:t>
+            </a:r>
+          </a:p>
+        </p:txBody>
+      </p:sp>
+      <p:sp>
+        <p:nvSpPr>
+          <p:cNvPr id="32" name="R32"/>
+          <p:cNvSpPr/>
+          <p:nvPr/>
+        </p:nvSpPr>
+        <p:spPr>
+          <a:xfrm>
+            <a:off x="5368600" y="3838000"/>
+            <a:ext cx="1740000" cy="184000"/>
+          </a:xfrm>
+          <a:prstGeom prst="roundRect">
+            <a:avLst>
+              <a:gd name="adj" fmla="val 50000"/>
+            </a:avLst>
+          </a:prstGeom>
+          <a:solidFill>
+            <a:srgbClr val="EDE7FB"/>
+          </a:solidFill>
+          <a:ln/>
+        </p:spPr>
+      </p:sp>
+      <p:sp>
+        <p:nvSpPr>
+          <p:cNvPr id="33" name="R33"/>
+          <p:cNvSpPr/>
+          <p:nvPr/>
+        </p:nvSpPr>
+        <p:spPr>
+          <a:xfrm>
+            <a:off x="5368600" y="3838000"/>
+            <a:ext cx="60000" cy="184000"/>
+          </a:xfrm>
+          <a:prstGeom prst="roundRect">
+            <a:avLst>
+              <a:gd name="adj" fmla="val 50000"/>
+            </a:avLst>
+          </a:prstGeom>
+          <a:solidFill>
+            <a:srgbClr val="7C3AED"/>
+          </a:solidFill>
+          <a:ln/>
+        </p:spPr>
+      </p:sp>
+      <p:sp>
+        <p:nvSpPr>
+          <p:cNvPr id="34" name="T34"/>
+          <p:cNvSpPr/>
+          <p:nvPr/>
+        </p:nvSpPr>
+        <p:spPr>
+          <a:xfrm>
+            <a:off x="7178600" y="3780000"/>
+            <a:ext cx="1322480" cy="300000"/>
+          </a:xfrm>
+          <a:prstGeom prst="rect">
+            <a:avLst/>
+          </a:prstGeom>
+          <a:noFill/>
+          <a:ln/>
+        </p:spPr>
+        <p:txBody>
+          <a:bodyPr wrap="square" lIns="0" tIns="0" rIns="0" bIns="0" rtlCol="0" anchor="ctr"/>
+          <a:lstStyle/>
+          <a:p>
+            <a:pPr algn="l" indent="0" marL="0">
+              <a:buNone/>
+            </a:pPr>
+            <a:r>
+              <a:rPr lang="pt-BR" sz="1100" b="1" dirty="0">
+                <a:solidFill>
+                  <a:srgbClr val="241C3B"/>
+                </a:solidFill>
+                <a:latin typeface="Calibri" pitchFamily="34" charset="0"/>
+                <a:ea typeface="Calibri"/>
+                <a:cs typeface="Calibri"/>
+              </a:rPr>
+              <a:t>0,5%  </a:t>
+            </a:r>
+            <a:r>
+              <a:rPr lang="pt-BR" sz="900" dirty="0">
+                <a:solidFill>
+                  <a:srgbClr val="6B6392"/>
+                </a:solidFill>
+                <a:latin typeface="Calibri" pitchFamily="34" charset="0"/>
+                <a:ea typeface="Calibri"/>
+                <a:cs typeface="Calibri"/>
+              </a:rPr>
+              <a:t>0,6×</a:t>
+            </a:r>
+          </a:p>
+        </p:txBody>
+      </p:sp>
+      <p:sp>
+        <p:nvSpPr>
+          <p:cNvPr id="35" name="R35"/>
+          <p:cNvSpPr/>
+          <p:nvPr/>
+        </p:nvSpPr>
+        <p:spPr>
+          <a:xfrm>
+            <a:off x="502920" y="4330000"/>
+            <a:ext cx="8138160" cy="650000"/>
+          </a:xfrm>
+          <a:prstGeom prst="roundRect">
+            <a:avLst>
+              <a:gd name="adj" fmla="val 10526"/>
+            </a:avLst>
+          </a:prstGeom>
+          <a:solidFill>
+            <a:srgbClr val="E9E2F8"/>
+          </a:solidFill>
+          <a:ln/>
+        </p:spPr>
+      </p:sp>
+      <p:sp>
+        <p:nvSpPr>
+          <p:cNvPr id="36" name="T36"/>
+          <p:cNvSpPr/>
+          <p:nvPr/>
+        </p:nvSpPr>
+        <p:spPr>
+          <a:xfrm>
+            <a:off x="708660" y="4330000"/>
+            <a:ext cx="7726680" cy="650000"/>
+          </a:xfrm>
+          <a:prstGeom prst="rect">
+            <a:avLst/>
+          </a:prstGeom>
+          <a:noFill/>
+          <a:ln/>
+        </p:spPr>
+        <p:txBody>
+          <a:bodyPr wrap="square" lIns="0" tIns="0" rIns="0" bIns="0" rtlCol="0" anchor="ctr"/>
           <a:lstStyle/>
           <a:p>
             <a:pPr algn="l" indent="0" marL="0">
               <a:lnSpc>
-                <a:spcPct val="108000"/>
+                <a:spcPct val="106000"/>
               </a:lnSpc>
               <a:buNone/>
             </a:pPr>
             <a:r>
-              <a:rPr lang="pt-BR" sz="1100" dirty="0">
+              <a:rPr lang="pt-BR" sz="1300" b="1" dirty="0">
+                <a:solidFill>
+                  <a:srgbClr val="7C3AED"/>
+                </a:solidFill>
+                <a:latin typeface="Calibri" pitchFamily="34" charset="0"/>
+                <a:ea typeface="Calibri"/>
+                <a:cs typeface="Calibri"/>
+              </a:rPr>
+              <a:t>Leitura   </a:t>
+            </a:r>
+            <a:r>
+              <a:rPr lang="pt-BR" sz="1300" dirty="0">
                 <a:solidFill>
                   <a:srgbClr val="241C3B"/>
                 </a:solidFill>
@@ -3567,29 +4022,60 @@
                 <a:ea typeface="Calibri"/>
                 <a:cs typeface="Calibri"/>
               </a:rPr>
-              <a:t>Os 113 gêneros finos se sobrepõem no espectro; só estilos distintivos alcançam alta precisão.</a:t>
-            </a:r>
-          </a:p>
-        </p:txBody>
-      </p:sp>
-      <p:sp>
-        <p:nvSpPr>
-          <p:cNvPr id="14" name="R14"/>
-          <p:cNvSpPr/>
-          <p:nvPr/>
-        </p:nvSpPr>
-        <p:spPr>
-          <a:xfrm>
-            <a:off x="6041080" y="1360000"/>
-            <a:ext cx="2600000" cy="1740000"/>
-          </a:xfrm>
-          <a:prstGeom prst="roundRect">
-            <a:avLst>
-              <a:gd name="adj" fmla="val 10526"/>
-            </a:avLst>
-          </a:prstGeom>
-          <a:solidFill>
-            <a:srgbClr val="F1ECFB"/>
+              <a:t>o áudio carrega sinal de gênero, mas os 113 gêneros finos se sobrepõem — só estilos distintivos (clássica) atingem alta precisão.</a:t>
+            </a:r>
+          </a:p>
+        </p:txBody>
+      </p:sp>
+    </p:spTree>
+  </p:cSld>
+  <p:clrMapOvr>
+    <a:masterClrMapping/>
+  </p:clrMapOvr>
+</p:sld>
+</file>
+
+<file path=ppt/slides/slide4.xml><?xml version="1.0" encoding="utf-8"?>
+<p:sld xmlns:a="http://schemas.openxmlformats.org/drawingml/2006/main" xmlns:r="http://schemas.openxmlformats.org/officeDocument/2006/relationships" xmlns:p="http://schemas.openxmlformats.org/presentationml/2006/main">
+  <p:cSld>
+    <p:bg>
+      <p:bgPr>
+        <a:solidFill>
+          <a:srgbClr val="FFFFFF"/>
+        </a:solidFill>
+        <a:effectLst/>
+      </p:bgPr>
+    </p:bg>
+    <p:spTree>
+      <p:nvGrpSpPr>
+        <p:cNvPr id="1" name=""/>
+        <p:cNvGrpSpPr/>
+        <p:nvPr/>
+      </p:nvGrpSpPr>
+      <p:grpSpPr>
+        <a:xfrm>
+          <a:off x="0" y="0"/>
+          <a:ext cx="0" cy="0"/>
+          <a:chOff x="0" y="0"/>
+          <a:chExt cx="0" cy="0"/>
+        </a:xfrm>
+      </p:grpSpPr>
+      <p:sp>
+        <p:nvSpPr>
+          <p:cNvPr id="2" name="E2"/>
+          <p:cNvSpPr/>
+          <p:nvPr/>
+        </p:nvSpPr>
+        <p:spPr>
+          <a:xfrm>
+            <a:off x="502920" y="457200"/>
+            <a:ext cx="640080" cy="640080"/>
+          </a:xfrm>
+          <a:prstGeom prst="ellipse">
+            <a:avLst/>
+          </a:prstGeom>
+          <a:solidFill>
+            <a:srgbClr val="7C3AED"/>
           </a:solidFill>
           <a:ln/>
           <a:effectLst>
@@ -3601,22 +4087,124 @@
           </a:effectLst>
         </p:spPr>
       </p:sp>
-      <p:sp>
-        <p:nvSpPr>
-          <p:cNvPr id="15" name="E15"/>
-          <p:cNvSpPr/>
-          <p:nvPr/>
-        </p:nvSpPr>
-        <p:spPr>
-          <a:xfrm>
-            <a:off x="6246820" y="1565740"/>
-            <a:ext cx="140000" cy="140000"/>
-          </a:xfrm>
-          <a:prstGeom prst="ellipse">
-            <a:avLst/>
-          </a:prstGeom>
-          <a:solidFill>
-            <a:srgbClr val="DB2777"/>
+      <p:pic>
+        <p:nvPicPr>
+          <p:cNvPr id="3" name="icon" descr="icon"/>
+          <p:cNvPicPr>
+            <a:picLocks noChangeAspect="1"/>
+          </p:cNvPicPr>
+          <p:nvPr/>
+        </p:nvPicPr>
+        <p:blipFill>
+          <a:blip r:embed="rId1"/>
+          <a:stretch>
+            <a:fillRect/>
+          </a:stretch>
+        </p:blipFill>
+        <p:spPr>
+          <a:xfrm>
+            <a:off x="658368" y="612648"/>
+            <a:ext cx="329184" cy="329184"/>
+          </a:xfrm>
+          <a:prstGeom prst="rect">
+            <a:avLst/>
+          </a:prstGeom>
+        </p:spPr>
+      </p:pic>
+      <p:sp>
+        <p:nvSpPr>
+          <p:cNvPr id="4" name="T4"/>
+          <p:cNvSpPr/>
+          <p:nvPr/>
+        </p:nvSpPr>
+        <p:spPr>
+          <a:xfrm>
+            <a:off x="1325880" y="438912"/>
+            <a:ext cx="7000000" cy="274320"/>
+          </a:xfrm>
+          <a:prstGeom prst="rect">
+            <a:avLst/>
+          </a:prstGeom>
+          <a:noFill/>
+          <a:ln/>
+        </p:spPr>
+        <p:txBody>
+          <a:bodyPr wrap="square" lIns="0" tIns="0" rIns="0" bIns="0" rtlCol="0" anchor="ctr"/>
+          <a:lstStyle/>
+          <a:p>
+            <a:pPr algn="l" indent="0" marL="0">
+              <a:buNone/>
+            </a:pPr>
+            <a:r>
+              <a:rPr lang="pt-BR" sz="1100" b="1" spc="200" kern="0" dirty="0">
+                <a:solidFill>
+                  <a:srgbClr val="7C3AED"/>
+                </a:solidFill>
+                <a:latin typeface="Consolas" pitchFamily="34" charset="0"/>
+                <a:ea typeface="Consolas"/>
+                <a:cs typeface="Consolas"/>
+              </a:rPr>
+              <a:t>09 — INSIGHTS &amp; CONCLUSÃO</a:t>
+            </a:r>
+          </a:p>
+        </p:txBody>
+      </p:sp>
+      <p:sp>
+        <p:nvSpPr>
+          <p:cNvPr id="5" name="T5"/>
+          <p:cNvSpPr/>
+          <p:nvPr/>
+        </p:nvSpPr>
+        <p:spPr>
+          <a:xfrm>
+            <a:off x="1325880" y="690000"/>
+            <a:ext cx="7315200" cy="470000"/>
+          </a:xfrm>
+          <a:prstGeom prst="rect">
+            <a:avLst/>
+          </a:prstGeom>
+          <a:noFill/>
+          <a:ln/>
+        </p:spPr>
+        <p:txBody>
+          <a:bodyPr wrap="square" lIns="0" tIns="0" rIns="0" bIns="0" rtlCol="0" anchor="ctr"/>
+          <a:lstStyle/>
+          <a:p>
+            <a:pPr algn="l" indent="0" marL="0">
+              <a:buNone/>
+            </a:pPr>
+            <a:r>
+              <a:rPr lang="pt-BR" sz="2600" b="1" dirty="0">
+                <a:solidFill>
+                  <a:srgbClr val="241C3B"/>
+                </a:solidFill>
+                <a:latin typeface="Calibri" pitchFamily="34" charset="0"/>
+                <a:ea typeface="Calibri"/>
+                <a:cs typeface="Calibri"/>
+              </a:rPr>
+              <a:t>Como o sistema apoia a decisão</a:t>
+            </a:r>
+          </a:p>
+        </p:txBody>
+      </p:sp>
+      <p:sp>
+        <p:nvSpPr>
+          <p:cNvPr id="6" name="R6"/>
+          <p:cNvSpPr/>
+          <p:nvPr/>
+        </p:nvSpPr>
+        <p:spPr>
+          <a:xfrm>
+            <a:off x="502920" y="1360000"/>
+            <a:ext cx="2600000" cy="1740000"/>
+          </a:xfrm>
+          <a:prstGeom prst="roundRect">
+            <a:avLst>
+              <a:gd name="adj" fmla="val 10526"/>
+            </a:avLst>
+          </a:prstGeom>
+          <a:solidFill>
+            <a:srgbClr val="F1ECFB"/>
           </a:solidFill>
           <a:ln/>
           <a:effectLst>
@@ -3630,13 +4218,40 @@
       </p:sp>
       <p:sp>
         <p:nvSpPr>
-          <p:cNvPr id="16" name="T16"/>
-          <p:cNvSpPr/>
-          <p:nvPr/>
-        </p:nvSpPr>
-        <p:spPr>
-          <a:xfrm>
-            <a:off x="6041080" y="1790000"/>
+          <p:cNvPr id="7" name="E7"/>
+          <p:cNvSpPr/>
+          <p:nvPr/>
+        </p:nvSpPr>
+        <p:spPr>
+          <a:xfrm>
+            <a:off x="708660" y="1565740"/>
+            <a:ext cx="140000" cy="140000"/>
+          </a:xfrm>
+          <a:prstGeom prst="ellipse">
+            <a:avLst/>
+          </a:prstGeom>
+          <a:solidFill>
+            <a:srgbClr val="DB2777"/>
+          </a:solidFill>
+          <a:ln/>
+          <a:effectLst>
+            <a:outerShdw sx="100000" sy="100000" kx="0" ky="0" algn="bl" rotWithShape="0" blurRad="101600" dist="25400" dir="5400000">
+              <a:srgbClr val="6B6392">
+                <a:alpha val="18000"/>
+              </a:srgbClr>
+            </a:outerShdw>
+          </a:effectLst>
+        </p:spPr>
+      </p:sp>
+      <p:sp>
+        <p:nvSpPr>
+          <p:cNvPr id="8" name="T8"/>
+          <p:cNvSpPr/>
+          <p:nvPr/>
+        </p:nvSpPr>
+        <p:spPr>
+          <a:xfrm>
+            <a:off x="502920" y="1790000"/>
             <a:ext cx="2600000" cy="360000"/>
           </a:xfrm>
           <a:prstGeom prst="rect">
@@ -3661,20 +4276,20 @@
                 <a:ea typeface="Calibri"/>
                 <a:cs typeface="Calibri"/>
               </a:rPr>
-              <a:t>K-Means = pré-filtro</a:t>
-            </a:r>
-          </a:p>
-        </p:txBody>
-      </p:sp>
-      <p:sp>
-        <p:nvSpPr>
-          <p:cNvPr id="17" name="T17"/>
-          <p:cNvSpPr/>
-          <p:nvPr/>
-        </p:nvSpPr>
-        <p:spPr>
-          <a:xfrm>
-            <a:off x="6041080" y="2140000"/>
+              <a:t>Conteúdo funciona</a:t>
+            </a:r>
+          </a:p>
+        </p:txBody>
+      </p:sp>
+      <p:sp>
+        <p:nvSpPr>
+          <p:cNvPr id="9" name="T9"/>
+          <p:cNvSpPr/>
+          <p:nvPr/>
+        </p:nvSpPr>
+        <p:spPr>
+          <a:xfrm>
+            <a:off x="502920" y="2140000"/>
             <a:ext cx="2600000" cy="920000"/>
           </a:xfrm>
           <a:prstGeom prst="rect">
@@ -3702,6 +4317,276 @@
                 <a:ea typeface="Calibri"/>
                 <a:cs typeface="Calibri"/>
               </a:rPr>
+              <a:t>Similaridade &gt; 0,90: recupera faixas acusticamente próximas ao gosto e apoia a decisão “o que ouvir a seguir”.</a:t>
+            </a:r>
+          </a:p>
+        </p:txBody>
+      </p:sp>
+      <p:sp>
+        <p:nvSpPr>
+          <p:cNvPr id="10" name="R10"/>
+          <p:cNvSpPr/>
+          <p:nvPr/>
+        </p:nvSpPr>
+        <p:spPr>
+          <a:xfrm>
+            <a:off x="3272000" y="1360000"/>
+            <a:ext cx="2600000" cy="1740000"/>
+          </a:xfrm>
+          <a:prstGeom prst="roundRect">
+            <a:avLst>
+              <a:gd name="adj" fmla="val 10526"/>
+            </a:avLst>
+          </a:prstGeom>
+          <a:solidFill>
+            <a:srgbClr val="F1ECFB"/>
+          </a:solidFill>
+          <a:ln/>
+          <a:effectLst>
+            <a:outerShdw sx="100000" sy="100000" kx="0" ky="0" algn="bl" rotWithShape="0" blurRad="101600" dist="25400" dir="5400000">
+              <a:srgbClr val="6B6392">
+                <a:alpha val="18000"/>
+              </a:srgbClr>
+            </a:outerShdw>
+          </a:effectLst>
+        </p:spPr>
+      </p:sp>
+      <p:sp>
+        <p:nvSpPr>
+          <p:cNvPr id="11" name="E11"/>
+          <p:cNvSpPr/>
+          <p:nvPr/>
+        </p:nvSpPr>
+        <p:spPr>
+          <a:xfrm>
+            <a:off x="3477740" y="1565740"/>
+            <a:ext cx="140000" cy="140000"/>
+          </a:xfrm>
+          <a:prstGeom prst="ellipse">
+            <a:avLst/>
+          </a:prstGeom>
+          <a:solidFill>
+            <a:srgbClr val="DB2777"/>
+          </a:solidFill>
+          <a:ln/>
+          <a:effectLst>
+            <a:outerShdw sx="100000" sy="100000" kx="0" ky="0" algn="bl" rotWithShape="0" blurRad="101600" dist="25400" dir="5400000">
+              <a:srgbClr val="6B6392">
+                <a:alpha val="18000"/>
+              </a:srgbClr>
+            </a:outerShdw>
+          </a:effectLst>
+        </p:spPr>
+      </p:sp>
+      <p:sp>
+        <p:nvSpPr>
+          <p:cNvPr id="12" name="T12"/>
+          <p:cNvSpPr/>
+          <p:nvPr/>
+        </p:nvSpPr>
+        <p:spPr>
+          <a:xfrm>
+            <a:off x="3272000" y="1790000"/>
+            <a:ext cx="2600000" cy="360000"/>
+          </a:xfrm>
+          <a:prstGeom prst="rect">
+            <a:avLst/>
+          </a:prstGeom>
+          <a:noFill/>
+          <a:ln/>
+        </p:spPr>
+        <p:txBody>
+          <a:bodyPr wrap="square" lIns="205740" tIns="0" rIns="205740" bIns="0" rtlCol="0" anchor="ctr"/>
+          <a:lstStyle/>
+          <a:p>
+            <a:pPr algn="l" indent="0" marL="0">
+              <a:buNone/>
+            </a:pPr>
+            <a:r>
+              <a:rPr lang="pt-BR" sz="1400" b="1" dirty="0">
+                <a:solidFill>
+                  <a:srgbClr val="7C3AED"/>
+                </a:solidFill>
+                <a:latin typeface="Calibri" pitchFamily="34" charset="0"/>
+                <a:ea typeface="Calibri"/>
+                <a:cs typeface="Calibri"/>
+              </a:rPr>
+              <a:t>Áudio não rotula gênero</a:t>
+            </a:r>
+          </a:p>
+        </p:txBody>
+      </p:sp>
+      <p:sp>
+        <p:nvSpPr>
+          <p:cNvPr id="13" name="T13"/>
+          <p:cNvSpPr/>
+          <p:nvPr/>
+        </p:nvSpPr>
+        <p:spPr>
+          <a:xfrm>
+            <a:off x="3272000" y="2140000"/>
+            <a:ext cx="2600000" cy="920000"/>
+          </a:xfrm>
+          <a:prstGeom prst="rect">
+            <a:avLst/>
+          </a:prstGeom>
+          <a:noFill/>
+          <a:ln/>
+        </p:spPr>
+        <p:txBody>
+          <a:bodyPr wrap="square" lIns="205740" tIns="0" rIns="205740" bIns="0" rtlCol="0" anchor="ctr"/>
+          <a:lstStyle/>
+          <a:p>
+            <a:pPr algn="l" indent="0" marL="0">
+              <a:lnSpc>
+                <a:spcPct val="108000"/>
+              </a:lnSpc>
+              <a:buNone/>
+            </a:pPr>
+            <a:r>
+              <a:rPr lang="pt-BR" sz="1100" dirty="0">
+                <a:solidFill>
+                  <a:srgbClr val="241C3B"/>
+                </a:solidFill>
+                <a:latin typeface="Calibri" pitchFamily="34" charset="0"/>
+                <a:ea typeface="Calibri"/>
+                <a:cs typeface="Calibri"/>
+              </a:rPr>
+              <a:t>Os 113 gêneros finos se sobrepõem no espectro; só estilos distintivos alcançam alta precisão.</a:t>
+            </a:r>
+          </a:p>
+        </p:txBody>
+      </p:sp>
+      <p:sp>
+        <p:nvSpPr>
+          <p:cNvPr id="14" name="R14"/>
+          <p:cNvSpPr/>
+          <p:nvPr/>
+        </p:nvSpPr>
+        <p:spPr>
+          <a:xfrm>
+            <a:off x="6041080" y="1360000"/>
+            <a:ext cx="2600000" cy="1740000"/>
+          </a:xfrm>
+          <a:prstGeom prst="roundRect">
+            <a:avLst>
+              <a:gd name="adj" fmla="val 10526"/>
+            </a:avLst>
+          </a:prstGeom>
+          <a:solidFill>
+            <a:srgbClr val="F1ECFB"/>
+          </a:solidFill>
+          <a:ln/>
+          <a:effectLst>
+            <a:outerShdw sx="100000" sy="100000" kx="0" ky="0" algn="bl" rotWithShape="0" blurRad="101600" dist="25400" dir="5400000">
+              <a:srgbClr val="6B6392">
+                <a:alpha val="18000"/>
+              </a:srgbClr>
+            </a:outerShdw>
+          </a:effectLst>
+        </p:spPr>
+      </p:sp>
+      <p:sp>
+        <p:nvSpPr>
+          <p:cNvPr id="15" name="E15"/>
+          <p:cNvSpPr/>
+          <p:nvPr/>
+        </p:nvSpPr>
+        <p:spPr>
+          <a:xfrm>
+            <a:off x="6246820" y="1565740"/>
+            <a:ext cx="140000" cy="140000"/>
+          </a:xfrm>
+          <a:prstGeom prst="ellipse">
+            <a:avLst/>
+          </a:prstGeom>
+          <a:solidFill>
+            <a:srgbClr val="DB2777"/>
+          </a:solidFill>
+          <a:ln/>
+          <a:effectLst>
+            <a:outerShdw sx="100000" sy="100000" kx="0" ky="0" algn="bl" rotWithShape="0" blurRad="101600" dist="25400" dir="5400000">
+              <a:srgbClr val="6B6392">
+                <a:alpha val="18000"/>
+              </a:srgbClr>
+            </a:outerShdw>
+          </a:effectLst>
+        </p:spPr>
+      </p:sp>
+      <p:sp>
+        <p:nvSpPr>
+          <p:cNvPr id="16" name="T16"/>
+          <p:cNvSpPr/>
+          <p:nvPr/>
+        </p:nvSpPr>
+        <p:spPr>
+          <a:xfrm>
+            <a:off x="6041080" y="1790000"/>
+            <a:ext cx="2600000" cy="360000"/>
+          </a:xfrm>
+          <a:prstGeom prst="rect">
+            <a:avLst/>
+          </a:prstGeom>
+          <a:noFill/>
+          <a:ln/>
+        </p:spPr>
+        <p:txBody>
+          <a:bodyPr wrap="square" lIns="205740" tIns="0" rIns="205740" bIns="0" rtlCol="0" anchor="ctr"/>
+          <a:lstStyle/>
+          <a:p>
+            <a:pPr algn="l" indent="0" marL="0">
+              <a:buNone/>
+            </a:pPr>
+            <a:r>
+              <a:rPr lang="pt-BR" sz="1400" b="1" dirty="0">
+                <a:solidFill>
+                  <a:srgbClr val="7C3AED"/>
+                </a:solidFill>
+                <a:latin typeface="Calibri" pitchFamily="34" charset="0"/>
+                <a:ea typeface="Calibri"/>
+                <a:cs typeface="Calibri"/>
+              </a:rPr>
+              <a:t>K-Means = pré-filtro</a:t>
+            </a:r>
+          </a:p>
+        </p:txBody>
+      </p:sp>
+      <p:sp>
+        <p:nvSpPr>
+          <p:cNvPr id="17" name="T17"/>
+          <p:cNvSpPr/>
+          <p:nvPr/>
+        </p:nvSpPr>
+        <p:spPr>
+          <a:xfrm>
+            <a:off x="6041080" y="2140000"/>
+            <a:ext cx="2600000" cy="920000"/>
+          </a:xfrm>
+          <a:prstGeom prst="rect">
+            <a:avLst/>
+          </a:prstGeom>
+          <a:noFill/>
+          <a:ln/>
+        </p:spPr>
+        <p:txBody>
+          <a:bodyPr wrap="square" lIns="205740" tIns="0" rIns="205740" bIns="0" rtlCol="0" anchor="ctr"/>
+          <a:lstStyle/>
+          <a:p>
+            <a:pPr algn="l" indent="0" marL="0">
+              <a:lnSpc>
+                <a:spcPct val="108000"/>
+              </a:lnSpc>
+              <a:buNone/>
+            </a:pPr>
+            <a:r>
+              <a:rPr lang="pt-BR" sz="1100" dirty="0">
+                <a:solidFill>
+                  <a:srgbClr val="241C3B"/>
+                </a:solidFill>
+                <a:latin typeface="Calibri" pitchFamily="34" charset="0"/>
+                <a:ea typeface="Calibri"/>
+                <a:cs typeface="Calibri"/>
+              </a:rPr>
               <a:t>Trade-off de engenharia: enxuga o custo do cosseno em catálogos massivos sem perder qualidade.</a:t>
             </a:r>
           </a:p>
@@ -3848,6 +4733,819 @@
                 <a:cs typeface="Calibri"/>
               </a:rPr>
               <a:t>viável sem histórico de interações e integralmente reprodutível (seed = 42).</a:t>
+            </a:r>
+          </a:p>
+        </p:txBody>
+      </p:sp>
+    </p:spTree>
+  </p:cSld>
+  <p:clrMapOvr>
+    <a:masterClrMapping/>
+  </p:clrMapOvr>
+</p:sld>
+</file>
+
+<file path=ppt/slides/slide5.xml><?xml version="1.0" encoding="utf-8"?>
+<p:sld xmlns:a="http://schemas.openxmlformats.org/drawingml/2006/main" xmlns:r="http://schemas.openxmlformats.org/officeDocument/2006/relationships" xmlns:p="http://schemas.openxmlformats.org/presentationml/2006/main">
+  <p:cSld>
+    <p:bg>
+      <p:bgPr>
+        <a:solidFill>
+          <a:srgbClr val="FFFFFF"/>
+        </a:solidFill>
+        <a:effectLst/>
+      </p:bgPr>
+    </p:bg>
+    <p:spTree>
+      <p:nvGrpSpPr>
+        <p:cNvPr id="1" name=""/>
+        <p:cNvGrpSpPr/>
+        <p:nvPr/>
+      </p:nvGrpSpPr>
+      <p:grpSpPr>
+        <a:xfrm>
+          <a:off x="0" y="0"/>
+          <a:ext cx="0" cy="0"/>
+          <a:chOff x="0" y="0"/>
+          <a:chExt cx="0" cy="0"/>
+        </a:xfrm>
+      </p:grpSpPr>
+      <p:sp>
+        <p:nvSpPr>
+          <p:cNvPr id="2" name="B2"/>
+          <p:cNvSpPr/>
+          <p:nvPr/>
+        </p:nvSpPr>
+        <p:spPr>
+          <a:xfrm>
+            <a:off x="457200" y="4763500"/>
+            <a:ext cx="100584" cy="380000"/>
+          </a:xfrm>
+          <a:prstGeom prst="roundRect">
+            <a:avLst>
+              <a:gd name="adj" fmla="val 45455"/>
+            </a:avLst>
+          </a:prstGeom>
+          <a:solidFill>
+            <a:srgbClr val="7C3AED">
+              <a:alpha val="65000"/>
+            </a:srgbClr>
+          </a:solidFill>
+          <a:ln/>
+        </p:spPr>
+      </p:sp>
+      <p:sp>
+        <p:nvSpPr>
+          <p:cNvPr id="3" name="B3"/>
+          <p:cNvSpPr/>
+          <p:nvPr/>
+        </p:nvSpPr>
+        <p:spPr>
+          <a:xfrm>
+            <a:off x="626364" y="4614668"/>
+            <a:ext cx="100584" cy="528832"/>
+          </a:xfrm>
+          <a:prstGeom prst="roundRect">
+            <a:avLst>
+              <a:gd name="adj" fmla="val 45455"/>
+            </a:avLst>
+          </a:prstGeom>
+          <a:solidFill>
+            <a:srgbClr val="DB2777">
+              <a:alpha val="65000"/>
+            </a:srgbClr>
+          </a:solidFill>
+          <a:ln/>
+        </p:spPr>
+      </p:sp>
+      <p:sp>
+        <p:nvSpPr>
+          <p:cNvPr id="4" name="B4"/>
+          <p:cNvSpPr/>
+          <p:nvPr/>
+        </p:nvSpPr>
+        <p:spPr>
+          <a:xfrm>
+            <a:off x="795528" y="4578469"/>
+            <a:ext cx="100584" cy="565031"/>
+          </a:xfrm>
+          <a:prstGeom prst="roundRect">
+            <a:avLst>
+              <a:gd name="adj" fmla="val 45455"/>
+            </a:avLst>
+          </a:prstGeom>
+          <a:solidFill>
+            <a:srgbClr val="0891B2">
+              <a:alpha val="65000"/>
+            </a:srgbClr>
+          </a:solidFill>
+          <a:ln/>
+        </p:spPr>
+      </p:sp>
+      <p:sp>
+        <p:nvSpPr>
+          <p:cNvPr id="5" name="B5"/>
+          <p:cNvSpPr/>
+          <p:nvPr/>
+        </p:nvSpPr>
+        <p:spPr>
+          <a:xfrm>
+            <a:off x="964692" y="4682298"/>
+            <a:ext cx="100584" cy="461202"/>
+          </a:xfrm>
+          <a:prstGeom prst="roundRect">
+            <a:avLst>
+              <a:gd name="adj" fmla="val 45455"/>
+            </a:avLst>
+          </a:prstGeom>
+          <a:solidFill>
+            <a:srgbClr val="7C3AED">
+              <a:alpha val="65000"/>
+            </a:srgbClr>
+          </a:solidFill>
+          <a:ln/>
+        </p:spPr>
+      </p:sp>
+      <p:sp>
+        <p:nvSpPr>
+          <p:cNvPr id="6" name="B6"/>
+          <p:cNvSpPr/>
+          <p:nvPr/>
+        </p:nvSpPr>
+        <p:spPr>
+          <a:xfrm>
+            <a:off x="1133856" y="4847579"/>
+            <a:ext cx="100584" cy="295921"/>
+          </a:xfrm>
+          <a:prstGeom prst="roundRect">
+            <a:avLst>
+              <a:gd name="adj" fmla="val 45455"/>
+            </a:avLst>
+          </a:prstGeom>
+          <a:solidFill>
+            <a:srgbClr val="DB2777">
+              <a:alpha val="65000"/>
+            </a:srgbClr>
+          </a:solidFill>
+          <a:ln/>
+        </p:spPr>
+      </p:sp>
+      <p:sp>
+        <p:nvSpPr>
+          <p:cNvPr id="7" name="B7"/>
+          <p:cNvSpPr/>
+          <p:nvPr/>
+        </p:nvSpPr>
+        <p:spPr>
+          <a:xfrm>
+            <a:off x="1303020" y="4949231"/>
+            <a:ext cx="100584" cy="194269"/>
+          </a:xfrm>
+          <a:prstGeom prst="roundRect">
+            <a:avLst>
+              <a:gd name="adj" fmla="val 45455"/>
+            </a:avLst>
+          </a:prstGeom>
+          <a:solidFill>
+            <a:srgbClr val="0891B2">
+              <a:alpha val="65000"/>
+            </a:srgbClr>
+          </a:solidFill>
+          <a:ln/>
+        </p:spPr>
+      </p:sp>
+      <p:sp>
+        <p:nvSpPr>
+          <p:cNvPr id="8" name="B8"/>
+          <p:cNvSpPr/>
+          <p:nvPr/>
+        </p:nvSpPr>
+        <p:spPr>
+          <a:xfrm>
+            <a:off x="1472184" y="4910326"/>
+            <a:ext cx="100584" cy="233174"/>
+          </a:xfrm>
+          <a:prstGeom prst="roundRect">
+            <a:avLst>
+              <a:gd name="adj" fmla="val 45455"/>
+            </a:avLst>
+          </a:prstGeom>
+          <a:solidFill>
+            <a:srgbClr val="7C3AED">
+              <a:alpha val="65000"/>
+            </a:srgbClr>
+          </a:solidFill>
+          <a:ln/>
+        </p:spPr>
+      </p:sp>
+      <p:sp>
+        <p:nvSpPr>
+          <p:cNvPr id="9" name="B9"/>
+          <p:cNvSpPr/>
+          <p:nvPr/>
+        </p:nvSpPr>
+        <p:spPr>
+          <a:xfrm>
+            <a:off x="1641348" y="4760306"/>
+            <a:ext cx="100584" cy="383194"/>
+          </a:xfrm>
+          <a:prstGeom prst="roundRect">
+            <a:avLst>
+              <a:gd name="adj" fmla="val 45455"/>
+            </a:avLst>
+          </a:prstGeom>
+          <a:solidFill>
+            <a:srgbClr val="DB2777">
+              <a:alpha val="65000"/>
+            </a:srgbClr>
+          </a:solidFill>
+          <a:ln/>
+        </p:spPr>
+      </p:sp>
+      <p:sp>
+        <p:nvSpPr>
+          <p:cNvPr id="10" name="B10"/>
+          <p:cNvSpPr/>
+          <p:nvPr/>
+        </p:nvSpPr>
+        <p:spPr>
+          <a:xfrm>
+            <a:off x="1810512" y="4612704"/>
+            <a:ext cx="100584" cy="530796"/>
+          </a:xfrm>
+          <a:prstGeom prst="roundRect">
+            <a:avLst>
+              <a:gd name="adj" fmla="val 45455"/>
+            </a:avLst>
+          </a:prstGeom>
+          <a:solidFill>
+            <a:srgbClr val="0891B2">
+              <a:alpha val="65000"/>
+            </a:srgbClr>
+          </a:solidFill>
+          <a:ln/>
+        </p:spPr>
+      </p:sp>
+      <p:sp>
+        <p:nvSpPr>
+          <p:cNvPr id="11" name="B11"/>
+          <p:cNvSpPr/>
+          <p:nvPr/>
+        </p:nvSpPr>
+        <p:spPr>
+          <a:xfrm>
+            <a:off x="1979676" y="4579221"/>
+            <a:ext cx="100584" cy="564279"/>
+          </a:xfrm>
+          <a:prstGeom prst="roundRect">
+            <a:avLst>
+              <a:gd name="adj" fmla="val 45455"/>
+            </a:avLst>
+          </a:prstGeom>
+          <a:solidFill>
+            <a:srgbClr val="7C3AED">
+              <a:alpha val="65000"/>
+            </a:srgbClr>
+          </a:solidFill>
+          <a:ln/>
+        </p:spPr>
+      </p:sp>
+      <p:sp>
+        <p:nvSpPr>
+          <p:cNvPr id="12" name="B12"/>
+          <p:cNvSpPr/>
+          <p:nvPr/>
+        </p:nvSpPr>
+        <p:spPr>
+          <a:xfrm>
+            <a:off x="2148840" y="4685198"/>
+            <a:ext cx="100584" cy="458302"/>
+          </a:xfrm>
+          <a:prstGeom prst="roundRect">
+            <a:avLst>
+              <a:gd name="adj" fmla="val 45455"/>
+            </a:avLst>
+          </a:prstGeom>
+          <a:solidFill>
+            <a:srgbClr val="DB2777">
+              <a:alpha val="65000"/>
+            </a:srgbClr>
+          </a:solidFill>
+          <a:ln/>
+        </p:spPr>
+      </p:sp>
+      <p:sp>
+        <p:nvSpPr>
+          <p:cNvPr id="13" name="B13"/>
+          <p:cNvSpPr/>
+          <p:nvPr/>
+        </p:nvSpPr>
+        <p:spPr>
+          <a:xfrm>
+            <a:off x="2318004" y="4850432"/>
+            <a:ext cx="100584" cy="293068"/>
+          </a:xfrm>
+          <a:prstGeom prst="roundRect">
+            <a:avLst>
+              <a:gd name="adj" fmla="val 45455"/>
+            </a:avLst>
+          </a:prstGeom>
+          <a:solidFill>
+            <a:srgbClr val="0891B2">
+              <a:alpha val="65000"/>
+            </a:srgbClr>
+          </a:solidFill>
+          <a:ln/>
+        </p:spPr>
+      </p:sp>
+      <p:sp>
+        <p:nvSpPr>
+          <p:cNvPr id="14" name="B14"/>
+          <p:cNvSpPr/>
+          <p:nvPr/>
+        </p:nvSpPr>
+        <p:spPr>
+          <a:xfrm>
+            <a:off x="2487168" y="4949878"/>
+            <a:ext cx="100584" cy="193622"/>
+          </a:xfrm>
+          <a:prstGeom prst="roundRect">
+            <a:avLst>
+              <a:gd name="adj" fmla="val 45455"/>
+            </a:avLst>
+          </a:prstGeom>
+          <a:solidFill>
+            <a:srgbClr val="7C3AED">
+              <a:alpha val="65000"/>
+            </a:srgbClr>
+          </a:solidFill>
+          <a:ln/>
+        </p:spPr>
+      </p:sp>
+      <p:sp>
+        <p:nvSpPr>
+          <p:cNvPr id="15" name="B15"/>
+          <p:cNvSpPr/>
+          <p:nvPr/>
+        </p:nvSpPr>
+        <p:spPr>
+          <a:xfrm>
+            <a:off x="2656332" y="4908277"/>
+            <a:ext cx="100584" cy="235223"/>
+          </a:xfrm>
+          <a:prstGeom prst="roundRect">
+            <a:avLst>
+              <a:gd name="adj" fmla="val 45455"/>
+            </a:avLst>
+          </a:prstGeom>
+          <a:solidFill>
+            <a:srgbClr val="DB2777">
+              <a:alpha val="65000"/>
+            </a:srgbClr>
+          </a:solidFill>
+          <a:ln/>
+        </p:spPr>
+      </p:sp>
+      <p:sp>
+        <p:nvSpPr>
+          <p:cNvPr id="16" name="B16"/>
+          <p:cNvSpPr/>
+          <p:nvPr/>
+        </p:nvSpPr>
+        <p:spPr>
+          <a:xfrm>
+            <a:off x="2825496" y="4757112"/>
+            <a:ext cx="100584" cy="386388"/>
+          </a:xfrm>
+          <a:prstGeom prst="roundRect">
+            <a:avLst>
+              <a:gd name="adj" fmla="val 45455"/>
+            </a:avLst>
+          </a:prstGeom>
+          <a:solidFill>
+            <a:srgbClr val="0891B2">
+              <a:alpha val="65000"/>
+            </a:srgbClr>
+          </a:solidFill>
+          <a:ln/>
+        </p:spPr>
+      </p:sp>
+      <p:sp>
+        <p:nvSpPr>
+          <p:cNvPr id="17" name="B17"/>
+          <p:cNvSpPr/>
+          <p:nvPr/>
+        </p:nvSpPr>
+        <p:spPr>
+          <a:xfrm>
+            <a:off x="2994660" y="4610781"/>
+            <a:ext cx="100584" cy="532719"/>
+          </a:xfrm>
+          <a:prstGeom prst="roundRect">
+            <a:avLst>
+              <a:gd name="adj" fmla="val 45455"/>
+            </a:avLst>
+          </a:prstGeom>
+          <a:solidFill>
+            <a:srgbClr val="7C3AED">
+              <a:alpha val="65000"/>
+            </a:srgbClr>
+          </a:solidFill>
+          <a:ln/>
+        </p:spPr>
+      </p:sp>
+      <p:sp>
+        <p:nvSpPr>
+          <p:cNvPr id="18" name="B18"/>
+          <p:cNvSpPr/>
+          <p:nvPr/>
+        </p:nvSpPr>
+        <p:spPr>
+          <a:xfrm>
+            <a:off x="3163824" y="4580026"/>
+            <a:ext cx="100584" cy="563474"/>
+          </a:xfrm>
+          <a:prstGeom prst="roundRect">
+            <a:avLst>
+              <a:gd name="adj" fmla="val 45455"/>
+            </a:avLst>
+          </a:prstGeom>
+          <a:solidFill>
+            <a:srgbClr val="DB2777">
+              <a:alpha val="65000"/>
+            </a:srgbClr>
+          </a:solidFill>
+          <a:ln/>
+        </p:spPr>
+      </p:sp>
+      <p:sp>
+        <p:nvSpPr>
+          <p:cNvPr id="19" name="B19"/>
+          <p:cNvSpPr/>
+          <p:nvPr/>
+        </p:nvSpPr>
+        <p:spPr>
+          <a:xfrm>
+            <a:off x="3332988" y="4688120"/>
+            <a:ext cx="100584" cy="455380"/>
+          </a:xfrm>
+          <a:prstGeom prst="roundRect">
+            <a:avLst>
+              <a:gd name="adj" fmla="val 45455"/>
+            </a:avLst>
+          </a:prstGeom>
+          <a:solidFill>
+            <a:srgbClr val="0891B2">
+              <a:alpha val="65000"/>
+            </a:srgbClr>
+          </a:solidFill>
+          <a:ln/>
+        </p:spPr>
+      </p:sp>
+      <p:sp>
+        <p:nvSpPr>
+          <p:cNvPr id="20" name="B20"/>
+          <p:cNvSpPr/>
+          <p:nvPr/>
+        </p:nvSpPr>
+        <p:spPr>
+          <a:xfrm>
+            <a:off x="3502152" y="4853261"/>
+            <a:ext cx="100584" cy="290239"/>
+          </a:xfrm>
+          <a:prstGeom prst="roundRect">
+            <a:avLst>
+              <a:gd name="adj" fmla="val 45455"/>
+            </a:avLst>
+          </a:prstGeom>
+          <a:solidFill>
+            <a:srgbClr val="7C3AED">
+              <a:alpha val="65000"/>
+            </a:srgbClr>
+          </a:solidFill>
+          <a:ln/>
+        </p:spPr>
+      </p:sp>
+      <p:sp>
+        <p:nvSpPr>
+          <p:cNvPr id="21" name="E21"/>
+          <p:cNvSpPr/>
+          <p:nvPr/>
+        </p:nvSpPr>
+        <p:spPr>
+          <a:xfrm>
+            <a:off x="502920" y="457200"/>
+            <a:ext cx="640080" cy="640080"/>
+          </a:xfrm>
+          <a:prstGeom prst="ellipse">
+            <a:avLst/>
+          </a:prstGeom>
+          <a:solidFill>
+            <a:srgbClr val="7C3AED"/>
+          </a:solidFill>
+          <a:ln/>
+          <a:effectLst>
+            <a:outerShdw sx="100000" sy="100000" kx="0" ky="0" algn="bl" rotWithShape="0" blurRad="101600" dist="25400" dir="5400000">
+              <a:srgbClr val="6B6392">
+                <a:alpha val="18000"/>
+              </a:srgbClr>
+            </a:outerShdw>
+          </a:effectLst>
+        </p:spPr>
+      </p:sp>
+      <p:pic>
+        <p:nvPicPr>
+          <p:cNvPr id="22" name="icon" descr="icon"/>
+          <p:cNvPicPr>
+            <a:picLocks noChangeAspect="1"/>
+          </p:cNvPicPr>
+          <p:nvPr/>
+        </p:nvPicPr>
+        <p:blipFill>
+          <a:blip r:embed="rId1"/>
+          <a:stretch>
+            <a:fillRect/>
+          </a:stretch>
+        </p:blipFill>
+        <p:spPr>
+          <a:xfrm>
+            <a:off x="658368" y="612648"/>
+            <a:ext cx="329184" cy="329184"/>
+          </a:xfrm>
+          <a:prstGeom prst="rect">
+            <a:avLst/>
+          </a:prstGeom>
+        </p:spPr>
+      </p:pic>
+      <p:sp>
+        <p:nvSpPr>
+          <p:cNvPr id="23" name="T23"/>
+          <p:cNvSpPr/>
+          <p:nvPr/>
+        </p:nvSpPr>
+        <p:spPr>
+          <a:xfrm>
+            <a:off x="1325880" y="438912"/>
+            <a:ext cx="7000000" cy="274320"/>
+          </a:xfrm>
+          <a:prstGeom prst="rect">
+            <a:avLst/>
+          </a:prstGeom>
+          <a:noFill/>
+          <a:ln/>
+        </p:spPr>
+        <p:txBody>
+          <a:bodyPr wrap="square" lIns="0" tIns="0" rIns="0" bIns="0" rtlCol="0" anchor="ctr"/>
+          <a:lstStyle/>
+          <a:p>
+            <a:pPr algn="l" indent="0" marL="0">
+              <a:buNone/>
+            </a:pPr>
+            <a:r>
+              <a:rPr lang="pt-BR" sz="1100" b="1" spc="200" kern="0" dirty="0">
+                <a:solidFill>
+                  <a:srgbClr val="7C3AED"/>
+                </a:solidFill>
+                <a:latin typeface="Consolas" pitchFamily="34" charset="0"/>
+                <a:ea typeface="Consolas"/>
+                <a:cs typeface="Consolas"/>
+              </a:rPr>
+              <a:t>10 — ENCERRAMENTO</a:t>
+            </a:r>
+          </a:p>
+        </p:txBody>
+      </p:sp>
+      <p:sp>
+        <p:nvSpPr>
+          <p:cNvPr id="24" name="T24"/>
+          <p:cNvSpPr/>
+          <p:nvPr/>
+        </p:nvSpPr>
+        <p:spPr>
+          <a:xfrm>
+            <a:off x="1325880" y="690000"/>
+            <a:ext cx="7315200" cy="470000"/>
+          </a:xfrm>
+          <a:prstGeom prst="rect">
+            <a:avLst/>
+          </a:prstGeom>
+          <a:noFill/>
+          <a:ln/>
+        </p:spPr>
+        <p:txBody>
+          <a:bodyPr wrap="square" lIns="0" tIns="0" rIns="0" bIns="0" rtlCol="0" anchor="ctr"/>
+          <a:lstStyle/>
+          <a:p>
+            <a:pPr algn="l" indent="0" marL="0">
+              <a:buNone/>
+            </a:pPr>
+            <a:r>
+              <a:rPr lang="pt-BR" sz="2600" b="1" dirty="0">
+                <a:solidFill>
+                  <a:srgbClr val="241C3B"/>
+                </a:solidFill>
+                <a:latin typeface="Calibri" pitchFamily="34" charset="0"/>
+                <a:ea typeface="Calibri"/>
+                <a:cs typeface="Calibri"/>
+              </a:rPr>
+              <a:t>Obrigado!</a:t>
+            </a:r>
+          </a:p>
+        </p:txBody>
+      </p:sp>
+      <p:sp>
+        <p:nvSpPr>
+          <p:cNvPr id="25" name="T25"/>
+          <p:cNvSpPr/>
+          <p:nvPr/>
+        </p:nvSpPr>
+        <p:spPr>
+          <a:xfrm>
+            <a:off x="1325880" y="1200000"/>
+            <a:ext cx="7000000" cy="360000"/>
+          </a:xfrm>
+          <a:prstGeom prst="rect">
+            <a:avLst/>
+          </a:prstGeom>
+          <a:noFill/>
+          <a:ln/>
+        </p:spPr>
+        <p:txBody>
+          <a:bodyPr wrap="square" lIns="0" tIns="0" rIns="0" bIns="0" rtlCol="0" anchor="ctr"/>
+          <a:lstStyle/>
+          <a:p>
+            <a:pPr algn="l" indent="0" marL="0">
+              <a:buNone/>
+            </a:pPr>
+            <a:r>
+              <a:rPr lang="pt-BR" sz="2000" b="1" dirty="0">
+                <a:solidFill>
+                  <a:srgbClr val="DB2777"/>
+                </a:solidFill>
+                <a:latin typeface="Calibri" pitchFamily="34" charset="0"/>
+                <a:ea typeface="Calibri"/>
+                <a:cs typeface="Calibri"/>
+              </a:rPr>
+              <a:t>Perguntas?</a:t>
+            </a:r>
+          </a:p>
+        </p:txBody>
+      </p:sp>
+      <p:sp>
+        <p:nvSpPr>
+          <p:cNvPr id="26" name="R26"/>
+          <p:cNvSpPr/>
+          <p:nvPr/>
+        </p:nvSpPr>
+        <p:spPr>
+          <a:xfrm>
+            <a:off x="502920" y="1860000"/>
+            <a:ext cx="8138160" cy="720000"/>
+          </a:xfrm>
+          <a:prstGeom prst="roundRect">
+            <a:avLst>
+              <a:gd name="adj" fmla="val 10526"/>
+            </a:avLst>
+          </a:prstGeom>
+          <a:solidFill>
+            <a:srgbClr val="E9E2F8"/>
+          </a:solidFill>
+          <a:ln/>
+        </p:spPr>
+      </p:sp>
+      <p:sp>
+        <p:nvSpPr>
+          <p:cNvPr id="27" name="T27"/>
+          <p:cNvSpPr/>
+          <p:nvPr/>
+        </p:nvSpPr>
+        <p:spPr>
+          <a:xfrm>
+            <a:off x="708660" y="1860000"/>
+            <a:ext cx="7726680" cy="720000"/>
+          </a:xfrm>
+          <a:prstGeom prst="rect">
+            <a:avLst/>
+          </a:prstGeom>
+          <a:noFill/>
+          <a:ln/>
+        </p:spPr>
+        <p:txBody>
+          <a:bodyPr wrap="square" lIns="0" tIns="0" rIns="0" bIns="0" rtlCol="0" anchor="ctr"/>
+          <a:lstStyle/>
+          <a:p>
+            <a:pPr algn="l" indent="0" marL="0">
+              <a:lnSpc>
+                <a:spcPct val="106000"/>
+              </a:lnSpc>
+              <a:buNone/>
+            </a:pPr>
+            <a:r>
+              <a:rPr lang="pt-BR" sz="1300" b="1" dirty="0">
+                <a:solidFill>
+                  <a:srgbClr val="7C3AED"/>
+                </a:solidFill>
+                <a:latin typeface="Calibri" pitchFamily="34" charset="0"/>
+                <a:ea typeface="Calibri"/>
+                <a:cs typeface="Calibri"/>
+              </a:rPr>
+              <a:t>Repositório   </a:t>
+            </a:r>
+            <a:r>
+              <a:rPr lang="pt-BR" sz="1300" dirty="0">
+                <a:solidFill>
+                  <a:srgbClr val="241C3B"/>
+                </a:solidFill>
+                <a:latin typeface="Calibri" pitchFamily="34" charset="0"/>
+                <a:ea typeface="Calibri"/>
+                <a:cs typeface="Calibri"/>
+              </a:rPr>
+              <a:t>github.com/pdetoni/tvc3-sistema-recomendacao-musical</a:t>
+            </a:r>
+          </a:p>
+        </p:txBody>
+      </p:sp>
+      <p:sp>
+        <p:nvSpPr>
+          <p:cNvPr id="28" name="T28"/>
+          <p:cNvSpPr/>
+          <p:nvPr/>
+        </p:nvSpPr>
+        <p:spPr>
+          <a:xfrm>
+            <a:off x="502920" y="2760000"/>
+            <a:ext cx="8138160" cy="520000"/>
+          </a:xfrm>
+          <a:prstGeom prst="rect">
+            <a:avLst/>
+          </a:prstGeom>
+          <a:noFill/>
+          <a:ln/>
+        </p:spPr>
+        <p:txBody>
+          <a:bodyPr wrap="square" lIns="0" tIns="0" rIns="0" bIns="0" rtlCol="0" anchor="ctr"/>
+          <a:lstStyle/>
+          <a:p>
+            <a:pPr algn="l" indent="0" marL="0">
+              <a:lnSpc>
+                <a:spcPct val="112000"/>
+              </a:lnSpc>
+              <a:buNone/>
+            </a:pPr>
+            <a:r>
+              <a:rPr lang="pt-BR" sz="1300" dirty="0">
+                <a:solidFill>
+                  <a:srgbClr val="241C3B"/>
+                </a:solidFill>
+                <a:latin typeface="Calibri" pitchFamily="34" charset="0"/>
+                <a:ea typeface="Calibri"/>
+                <a:cs typeface="Calibri"/>
+              </a:rPr>
+              <a:t>App em Streamlit (3 painéis) · experimentos </a:t>
+            </a:r>
+            <a:r>
+              <a:rPr lang="pt-BR" sz="1300" b="1" dirty="0">
+                <a:solidFill>
+                  <a:srgbClr val="7C3AED"/>
+                </a:solidFill>
+                <a:latin typeface="Calibri" pitchFamily="34" charset="0"/>
+                <a:ea typeface="Calibri"/>
+                <a:cs typeface="Calibri"/>
+              </a:rPr>
+              <a:t>reprodutíveis</a:t>
+            </a:r>
+            <a:r>
+              <a:rPr lang="pt-BR" sz="1300" dirty="0">
+                <a:solidFill>
+                  <a:srgbClr val="241C3B"/>
+                </a:solidFill>
+                <a:latin typeface="Calibri" pitchFamily="34" charset="0"/>
+                <a:ea typeface="Calibri"/>
+                <a:cs typeface="Calibri"/>
+              </a:rPr>
+              <a:t> via </a:t>
+            </a:r>
+            <a:r>
+              <a:rPr lang="pt-BR" sz="1150" dirty="0">
+                <a:solidFill>
+                  <a:srgbClr val="241C3B"/>
+                </a:solidFill>
+                <a:latin typeface="Consolas" pitchFamily="34" charset="0"/>
+                <a:ea typeface="Consolas"/>
+                <a:cs typeface="Consolas"/>
+              </a:rPr>
+              <a:t>reproduzir_experimentos.py</a:t>
+            </a:r>
+            <a:r>
+              <a:rPr lang="pt-BR" sz="1300" dirty="0">
+                <a:solidFill>
+                  <a:srgbClr val="241C3B"/>
+                </a:solidFill>
+                <a:latin typeface="Calibri" pitchFamily="34" charset="0"/>
+                <a:ea typeface="Calibri"/>
+                <a:cs typeface="Calibri"/>
+              </a:rPr>
+              <a:t>  (seed = 42)</a:t>
             </a:r>
           </a:p>
         </p:txBody>
